--- a/outputs/MetisOne_Platform_YouTube_Deck.pptx
+++ b/outputs/MetisOne_Platform_YouTube_Deck.pptx
@@ -1,125 +1,27 @@
 
-<file path=ppt/presentation.xml><?xml version="1.0" encoding="utf-8"?>
-<p:presentation xmlns:p="http://schemas.openxmlformats.org/presentationml/2006/main">
-  <p:sldMasterIdLst>
-    <p:sldMasterId xmlns:r="http://schemas.openxmlformats.org/officeDocument/2006/relationships" id="2147483648" r:id="R6d1e11ac04304194"/>
-  </p:sldMasterIdLst>
-  <p:notesMasterIdLst>
-    <p:notesMasterId xmlns:r="http://schemas.openxmlformats.org/officeDocument/2006/relationships" r:id="Rbf8b372b48e14536"/>
-  </p:notesMasterIdLst>
-  <p:sldIdLst>
-    <p:sldId xmlns:r="http://schemas.openxmlformats.org/officeDocument/2006/relationships" id="256" r:id="R6a6ab140f80341a0"/>
-    <p:sldId xmlns:r="http://schemas.openxmlformats.org/officeDocument/2006/relationships" id="257" r:id="Rb47ad266951143de"/>
-    <p:sldId xmlns:r="http://schemas.openxmlformats.org/officeDocument/2006/relationships" id="258" r:id="R085d92aa13114e66"/>
-    <p:sldId xmlns:r="http://schemas.openxmlformats.org/officeDocument/2006/relationships" id="259" r:id="R428be32dc08b494a"/>
-    <p:sldId xmlns:r="http://schemas.openxmlformats.org/officeDocument/2006/relationships" id="260" r:id="R53903a881f564903"/>
-    <p:sldId xmlns:r="http://schemas.openxmlformats.org/officeDocument/2006/relationships" id="261" r:id="R9ee5b8c6d0ed4e30"/>
-    <p:sldId xmlns:r="http://schemas.openxmlformats.org/officeDocument/2006/relationships" id="262" r:id="R30ef110b5f964aef"/>
-    <p:sldId xmlns:r="http://schemas.openxmlformats.org/officeDocument/2006/relationships" id="263" r:id="R07dcf000bba442cf"/>
-    <p:sldId xmlns:r="http://schemas.openxmlformats.org/officeDocument/2006/relationships" id="264" r:id="R11dc52ca50f0413b"/>
-    <p:sldId xmlns:r="http://schemas.openxmlformats.org/officeDocument/2006/relationships" id="265" r:id="Rfdb3fe5703854d36"/>
-  </p:sldIdLst>
-  <p:sldSz cx="12192000" cy="6858000"/>
-  <p:notesSz cx="6858000" cy="9144000"/>
-  <p:defaultTextStyle>
-    <a:defPPr xmlns:a="http://schemas.openxmlformats.org/drawingml/2006/main">
-      <a:defRPr lang="en-US"/>
-    </a:defPPr>
-    <a:lvl1pPr xmlns:a="http://schemas.openxmlformats.org/drawingml/2006/main" marL="0" indent="0" algn="l" defTabSz="914400">
-      <a:defRPr sz="1800" kern="1200">
-        <a:solidFill>
-          <a:schemeClr val="tx1"/>
-        </a:solidFill>
-        <a:latin typeface="+mn-lt"/>
-        <a:ea typeface="+mn-ea"/>
-        <a:cs typeface="+mn-cs"/>
-      </a:defRPr>
-    </a:lvl1pPr>
-    <a:lvl2pPr xmlns:a="http://schemas.openxmlformats.org/drawingml/2006/main" marL="457200" indent="0" algn="l" defTabSz="914400">
-      <a:defRPr sz="1800" kern="1200">
-        <a:solidFill>
-          <a:schemeClr val="tx1"/>
-        </a:solidFill>
-        <a:latin typeface="+mn-lt"/>
-        <a:ea typeface="+mn-ea"/>
-        <a:cs typeface="+mn-cs"/>
-      </a:defRPr>
-    </a:lvl2pPr>
-    <a:lvl3pPr xmlns:a="http://schemas.openxmlformats.org/drawingml/2006/main" marL="914400" indent="0" algn="l" defTabSz="914400">
-      <a:defRPr sz="1800" kern="1200">
-        <a:solidFill>
-          <a:schemeClr val="tx1"/>
-        </a:solidFill>
-        <a:latin typeface="+mn-lt"/>
-        <a:ea typeface="+mn-ea"/>
-        <a:cs typeface="+mn-cs"/>
-      </a:defRPr>
-    </a:lvl3pPr>
-    <a:lvl4pPr xmlns:a="http://schemas.openxmlformats.org/drawingml/2006/main" marL="1371600" indent="0" algn="l" defTabSz="914400">
-      <a:defRPr sz="1800" kern="1200">
-        <a:solidFill>
-          <a:schemeClr val="tx1"/>
-        </a:solidFill>
-        <a:latin typeface="+mn-lt"/>
-        <a:ea typeface="+mn-ea"/>
-        <a:cs typeface="+mn-cs"/>
-      </a:defRPr>
-    </a:lvl4pPr>
-    <a:lvl5pPr xmlns:a="http://schemas.openxmlformats.org/drawingml/2006/main" marL="1828800" indent="0" algn="l" defTabSz="914400">
-      <a:defRPr sz="1800" kern="1200">
-        <a:solidFill>
-          <a:schemeClr val="tx1"/>
-        </a:solidFill>
-        <a:latin typeface="+mn-lt"/>
-        <a:ea typeface="+mn-ea"/>
-        <a:cs typeface="+mn-cs"/>
-      </a:defRPr>
-    </a:lvl5pPr>
-    <a:lvl6pPr xmlns:a="http://schemas.openxmlformats.org/drawingml/2006/main" marL="2286000" indent="0" algn="l" defTabSz="914400">
-      <a:defRPr sz="1800" kern="1200">
-        <a:solidFill>
-          <a:schemeClr val="tx1"/>
-        </a:solidFill>
-        <a:latin typeface="+mn-lt"/>
-        <a:ea typeface="+mn-ea"/>
-        <a:cs typeface="+mn-cs"/>
-      </a:defRPr>
-    </a:lvl6pPr>
-    <a:lvl7pPr xmlns:a="http://schemas.openxmlformats.org/drawingml/2006/main" marL="2743200" indent="0" algn="l" defTabSz="914400">
-      <a:defRPr sz="1800" kern="1200">
-        <a:solidFill>
-          <a:schemeClr val="tx1"/>
-        </a:solidFill>
-        <a:latin typeface="+mn-lt"/>
-        <a:ea typeface="+mn-ea"/>
-        <a:cs typeface="+mn-cs"/>
-      </a:defRPr>
-    </a:lvl7pPr>
-    <a:lvl8pPr xmlns:a="http://schemas.openxmlformats.org/drawingml/2006/main" marL="3200400" indent="0" algn="l" defTabSz="914400">
-      <a:defRPr sz="1800" kern="1200">
-        <a:solidFill>
-          <a:schemeClr val="tx1"/>
-        </a:solidFill>
-        <a:latin typeface="+mn-lt"/>
-        <a:ea typeface="+mn-ea"/>
-        <a:cs typeface="+mn-cs"/>
-      </a:defRPr>
-    </a:lvl8pPr>
-    <a:lvl9pPr xmlns:a="http://schemas.openxmlformats.org/drawingml/2006/main" marL="3657600" indent="0" algn="l" defTabSz="914400">
-      <a:defRPr sz="1800" kern="1200">
-        <a:solidFill>
-          <a:schemeClr val="tx1"/>
-        </a:solidFill>
-        <a:latin typeface="+mn-lt"/>
-        <a:ea typeface="+mn-ea"/>
-        <a:cs typeface="+mn-cs"/>
-      </a:defRPr>
-    </a:lvl9pPr>
-  </p:defaultTextStyle>
-</p:presentation>
+<file path=docProps\app.xml><?xml version="1.0" encoding="utf-8"?>
+<ap:Properties xmlns:ap="http://schemas.openxmlformats.org/officeDocument/2006/extended-properties">
+  <ap:Application>Walnut Exporter</ap:Application>
+  <ap:PresentationFormat>Converted Presentation</ap:PresentationFormat>
+  <ap:Slides>11</ap:Slides>
+  <ap:Notes>0</ap:Notes>
+  <ap:HiddenSlides>0</ap:HiddenSlides>
+  <ap:SharedDoc>false</ap:SharedDoc>
+  <ap:DocSecurity>0</ap:DocSecurity>
+</ap:Properties>
 </file>
 
-<file path=ppt/notesMasters/notesMaster1.xml><?xml version="1.0" encoding="utf-8"?>
+<file path=docProps\core.xml><?xml version="1.0" encoding="utf-8"?>
+<coreProperties xmlns:dc="http://purl.org/dc/elements/1.1/" xmlns:dcterms="http://purl.org/dc/terms/" xmlns:xsi="http://www.w3.org/2001/XMLSchema-instance" xmlns="http://schemas.openxmlformats.org/package/2006/metadata/core-properties">
+  <dc:creator>Walnut Exporter</dc:creator>
+  <lastModifiedBy>Walnut Exporter</lastModifiedBy>
+  <dc:title>Presentation</dc:title>
+  <dcterms:created xsi:type="dcterms:W3CDTF">2026-07-20T09:22:05.7900000Z</dcterms:created>
+  <dcterms:modified xsi:type="dcterms:W3CDTF">2026-07-20T09:22:05.7900000Z</dcterms:modified>
+</coreProperties>
+</file>
+
+<file path=ppt\notesMasters\notesMaster1.xml><?xml version="1.0" encoding="utf-8"?>
 <p:notesMaster xmlns:p="http://schemas.openxmlformats.org/presentationml/2006/main">
   <p:cSld>
     <p:bg>
@@ -261,7 +163,7 @@
 </p:notesMaster>
 </file>
 
-<file path=ppt/notesMasters/theme/theme3.xml><?xml version="1.0" encoding="utf-8"?>
+<file path=ppt\notesMasters\theme\theme3.xml><?xml version="1.0" encoding="utf-8"?>
 <a:theme xmlns:a="http://schemas.openxmlformats.org/drawingml/2006/main" name="ChatGPT">
   <a:themeElements>
     <a:clrScheme name="ChatGPT">
@@ -506,7 +408,7 @@
 </a:theme>
 </file>
 
-<file path=ppt/notesSlides/notesSlide1.xml><?xml version="1.0" encoding="utf-8"?>
+<file path=ppt\notesSlides\notesSlide1.xml><?xml version="1.0" encoding="utf-8"?>
 <p:notes xmlns:p="http://schemas.openxmlformats.org/presentationml/2006/main">
   <p:cSld>
     <p:spTree>
@@ -572,7 +474,7 @@
 </p:notes>
 </file>
 
-<file path=ppt/notesSlides/notesSlide10.xml><?xml version="1.0" encoding="utf-8"?>
+<file path=ppt\notesSlides\notesSlide10.xml><?xml version="1.0" encoding="utf-8"?>
 <p:notes xmlns:p="http://schemas.openxmlformats.org/presentationml/2006/main">
   <p:cSld>
     <p:spTree>
@@ -638,7 +540,7 @@
 </p:notes>
 </file>
 
-<file path=ppt/notesSlides/notesSlide2.xml><?xml version="1.0" encoding="utf-8"?>
+<file path=ppt\notesSlides\notesSlide2.xml><?xml version="1.0" encoding="utf-8"?>
 <p:notes xmlns:p="http://schemas.openxmlformats.org/presentationml/2006/main">
   <p:cSld>
     <p:spTree>
@@ -704,7 +606,7 @@
 </p:notes>
 </file>
 
-<file path=ppt/notesSlides/notesSlide3.xml><?xml version="1.0" encoding="utf-8"?>
+<file path=ppt\notesSlides\notesSlide3.xml><?xml version="1.0" encoding="utf-8"?>
 <p:notes xmlns:p="http://schemas.openxmlformats.org/presentationml/2006/main">
   <p:cSld>
     <p:spTree>
@@ -770,7 +672,7 @@
 </p:notes>
 </file>
 
-<file path=ppt/notesSlides/notesSlide4.xml><?xml version="1.0" encoding="utf-8"?>
+<file path=ppt\notesSlides\notesSlide4.xml><?xml version="1.0" encoding="utf-8"?>
 <p:notes xmlns:p="http://schemas.openxmlformats.org/presentationml/2006/main">
   <p:cSld>
     <p:spTree>
@@ -836,7 +738,7 @@
 </p:notes>
 </file>
 
-<file path=ppt/notesSlides/notesSlide5.xml><?xml version="1.0" encoding="utf-8"?>
+<file path=ppt\notesSlides\notesSlide5.xml><?xml version="1.0" encoding="utf-8"?>
 <p:notes xmlns:p="http://schemas.openxmlformats.org/presentationml/2006/main">
   <p:cSld>
     <p:spTree>
@@ -902,7 +804,7 @@
 </p:notes>
 </file>
 
-<file path=ppt/notesSlides/notesSlide6.xml><?xml version="1.0" encoding="utf-8"?>
+<file path=ppt\notesSlides\notesSlide6.xml><?xml version="1.0" encoding="utf-8"?>
 <p:notes xmlns:p="http://schemas.openxmlformats.org/presentationml/2006/main">
   <p:cSld>
     <p:spTree>
@@ -968,7 +870,7 @@
 </p:notes>
 </file>
 
-<file path=ppt/notesSlides/notesSlide7.xml><?xml version="1.0" encoding="utf-8"?>
+<file path=ppt\notesSlides\notesSlide7.xml><?xml version="1.0" encoding="utf-8"?>
 <p:notes xmlns:p="http://schemas.openxmlformats.org/presentationml/2006/main">
   <p:cSld>
     <p:spTree>
@@ -1034,7 +936,7 @@
 </p:notes>
 </file>
 
-<file path=ppt/notesSlides/notesSlide8.xml><?xml version="1.0" encoding="utf-8"?>
+<file path=ppt\notesSlides\notesSlide8.xml><?xml version="1.0" encoding="utf-8"?>
 <p:notes xmlns:p="http://schemas.openxmlformats.org/presentationml/2006/main">
   <p:cSld>
     <p:spTree>
@@ -1100,7 +1002,7 @@
 </p:notes>
 </file>
 
-<file path=ppt/notesSlides/notesSlide9.xml><?xml version="1.0" encoding="utf-8"?>
+<file path=ppt\notesSlides\notesSlide9.xml><?xml version="1.0" encoding="utf-8"?>
 <p:notes xmlns:p="http://schemas.openxmlformats.org/presentationml/2006/main">
   <p:cSld>
     <p:spTree>
@@ -1166,7 +1068,144 @@
 </p:notes>
 </file>
 
-<file path=ppt/slideLayouts/slideLayout1.xml><?xml version="1.0" encoding="utf-8"?>
+<file path=ppt\presProps.xml><?xml version="1.0" encoding="utf-8"?>
+<p:presentationPr xmlns:p="http://schemas.openxmlformats.org/presentationml/2006/main">
+  <p:extLst>
+    <p:ext xmlns:p14="http://schemas.microsoft.com/office/powerpoint/2010/main" uri="{E76CE94A-603C-4142-B9EB-6D1370010A27}">
+      <p14:discardImageEditData val="0"/>
+    </p:ext>
+    <p:ext xmlns:p14="http://schemas.microsoft.com/office/powerpoint/2010/main" uri="{D31A062A-798A-4329-ABDD-BBA856620510}">
+      <p14:defaultImageDpi val="32767"/>
+    </p:ext>
+    <p:ext xmlns:p15="http://schemas.microsoft.com/office/powerpoint/2012/main" uri="{FD5EFAAD-0ECE-453E-9831-46B23BE46B34}">
+      <p15:chartTrackingRefBased val="1"/>
+    </p:ext>
+  </p:extLst>
+</p:presentationPr>
+</file>
+
+<file path=ppt\presentation.xml><?xml version="1.0" encoding="utf-8"?>
+<p:presentation xmlns:p="http://schemas.openxmlformats.org/presentationml/2006/main">
+  <p:sldMasterIdLst>
+    <p:sldMasterId xmlns:r="http://schemas.openxmlformats.org/officeDocument/2006/relationships" id="2147483648" r:id="R6d1e11ac04304194"/>
+  </p:sldMasterIdLst>
+  <p:notesMasterIdLst>
+    <p:notesMasterId xmlns:r="http://schemas.openxmlformats.org/officeDocument/2006/relationships" r:id="Rbf8b372b48e14536"/>
+  </p:notesMasterIdLst>
+  <p:sldIdLst>
+    <p:sldId xmlns:r="http://schemas.openxmlformats.org/officeDocument/2006/relationships" id="256" r:id="R6a6ab140f80341a0"/>
+    <p:sldId xmlns:r="http://schemas.openxmlformats.org/officeDocument/2006/relationships" id="257" r:id="Rb47ad266951143de"/>
+    <p:sldId xmlns:r="http://schemas.openxmlformats.org/officeDocument/2006/relationships" id="258" r:id="R085d92aa13114e66"/>
+    <p:sldId xmlns:r="http://schemas.openxmlformats.org/officeDocument/2006/relationships" id="259" r:id="R428be32dc08b494a"/>
+    <p:sldId xmlns:r="http://schemas.openxmlformats.org/officeDocument/2006/relationships" id="260" r:id="R53903a881f564903"/>
+    <p:sldId xmlns:r="http://schemas.openxmlformats.org/officeDocument/2006/relationships" id="261" r:id="R9ee5b8c6d0ed4e30"/>
+    <p:sldId xmlns:r="http://schemas.openxmlformats.org/officeDocument/2006/relationships" id="262" r:id="R30ef110b5f964aef"/>
+    <p:sldId xmlns:r="http://schemas.openxmlformats.org/officeDocument/2006/relationships" id="263" r:id="R07dcf000bba442cf"/>
+    <p:sldId xmlns:r="http://schemas.openxmlformats.org/officeDocument/2006/relationships" id="264" r:id="R11dc52ca50f0413b"/>
+    <p:sldId xmlns:r="http://schemas.openxmlformats.org/officeDocument/2006/relationships" id="265" r:id="Rfdb3fe5703854d36"/>
+    <p:sldId xmlns:d3p1="http://schemas.openxmlformats.org/officeDocument/2006/relationships" id="266" d3p1:id="RmetisoneInfraSlide"/>
+  </p:sldIdLst>
+  <p:sldSz cx="12192000" cy="6858000"/>
+  <p:notesSz cx="6858000" cy="9144000"/>
+  <p:defaultTextStyle>
+    <a:defPPr xmlns:a="http://schemas.openxmlformats.org/drawingml/2006/main">
+      <a:defRPr lang="en-US"/>
+    </a:defPPr>
+    <a:lvl1pPr xmlns:a="http://schemas.openxmlformats.org/drawingml/2006/main" marL="0" indent="0" algn="l" defTabSz="914400">
+      <a:defRPr sz="1800" kern="1200">
+        <a:solidFill>
+          <a:schemeClr val="tx1"/>
+        </a:solidFill>
+        <a:latin typeface="+mn-lt"/>
+        <a:ea typeface="+mn-ea"/>
+        <a:cs typeface="+mn-cs"/>
+      </a:defRPr>
+    </a:lvl1pPr>
+    <a:lvl2pPr xmlns:a="http://schemas.openxmlformats.org/drawingml/2006/main" marL="457200" indent="0" algn="l" defTabSz="914400">
+      <a:defRPr sz="1800" kern="1200">
+        <a:solidFill>
+          <a:schemeClr val="tx1"/>
+        </a:solidFill>
+        <a:latin typeface="+mn-lt"/>
+        <a:ea typeface="+mn-ea"/>
+        <a:cs typeface="+mn-cs"/>
+      </a:defRPr>
+    </a:lvl2pPr>
+    <a:lvl3pPr xmlns:a="http://schemas.openxmlformats.org/drawingml/2006/main" marL="914400" indent="0" algn="l" defTabSz="914400">
+      <a:defRPr sz="1800" kern="1200">
+        <a:solidFill>
+          <a:schemeClr val="tx1"/>
+        </a:solidFill>
+        <a:latin typeface="+mn-lt"/>
+        <a:ea typeface="+mn-ea"/>
+        <a:cs typeface="+mn-cs"/>
+      </a:defRPr>
+    </a:lvl3pPr>
+    <a:lvl4pPr xmlns:a="http://schemas.openxmlformats.org/drawingml/2006/main" marL="1371600" indent="0" algn="l" defTabSz="914400">
+      <a:defRPr sz="1800" kern="1200">
+        <a:solidFill>
+          <a:schemeClr val="tx1"/>
+        </a:solidFill>
+        <a:latin typeface="+mn-lt"/>
+        <a:ea typeface="+mn-ea"/>
+        <a:cs typeface="+mn-cs"/>
+      </a:defRPr>
+    </a:lvl4pPr>
+    <a:lvl5pPr xmlns:a="http://schemas.openxmlformats.org/drawingml/2006/main" marL="1828800" indent="0" algn="l" defTabSz="914400">
+      <a:defRPr sz="1800" kern="1200">
+        <a:solidFill>
+          <a:schemeClr val="tx1"/>
+        </a:solidFill>
+        <a:latin typeface="+mn-lt"/>
+        <a:ea typeface="+mn-ea"/>
+        <a:cs typeface="+mn-cs"/>
+      </a:defRPr>
+    </a:lvl5pPr>
+    <a:lvl6pPr xmlns:a="http://schemas.openxmlformats.org/drawingml/2006/main" marL="2286000" indent="0" algn="l" defTabSz="914400">
+      <a:defRPr sz="1800" kern="1200">
+        <a:solidFill>
+          <a:schemeClr val="tx1"/>
+        </a:solidFill>
+        <a:latin typeface="+mn-lt"/>
+        <a:ea typeface="+mn-ea"/>
+        <a:cs typeface="+mn-cs"/>
+      </a:defRPr>
+    </a:lvl6pPr>
+    <a:lvl7pPr xmlns:a="http://schemas.openxmlformats.org/drawingml/2006/main" marL="2743200" indent="0" algn="l" defTabSz="914400">
+      <a:defRPr sz="1800" kern="1200">
+        <a:solidFill>
+          <a:schemeClr val="tx1"/>
+        </a:solidFill>
+        <a:latin typeface="+mn-lt"/>
+        <a:ea typeface="+mn-ea"/>
+        <a:cs typeface="+mn-cs"/>
+      </a:defRPr>
+    </a:lvl7pPr>
+    <a:lvl8pPr xmlns:a="http://schemas.openxmlformats.org/drawingml/2006/main" marL="3200400" indent="0" algn="l" defTabSz="914400">
+      <a:defRPr sz="1800" kern="1200">
+        <a:solidFill>
+          <a:schemeClr val="tx1"/>
+        </a:solidFill>
+        <a:latin typeface="+mn-lt"/>
+        <a:ea typeface="+mn-ea"/>
+        <a:cs typeface="+mn-cs"/>
+      </a:defRPr>
+    </a:lvl8pPr>
+    <a:lvl9pPr xmlns:a="http://schemas.openxmlformats.org/drawingml/2006/main" marL="3657600" indent="0" algn="l" defTabSz="914400">
+      <a:defRPr sz="1800" kern="1200">
+        <a:solidFill>
+          <a:schemeClr val="tx1"/>
+        </a:solidFill>
+        <a:latin typeface="+mn-lt"/>
+        <a:ea typeface="+mn-ea"/>
+        <a:cs typeface="+mn-cs"/>
+      </a:defRPr>
+    </a:lvl9pPr>
+  </p:defaultTextStyle>
+</p:presentation>
+</file>
+
+<file path=ppt\slideLayouts\slideLayout1.xml><?xml version="1.0" encoding="utf-8"?>
 <p:sldLayout xmlns:p="http://schemas.openxmlformats.org/presentationml/2006/main" type="title">
   <p:cSld name="Title Slide">
     <p:spTree>
@@ -1183,7 +1222,7 @@
 </p:sldLayout>
 </file>
 
-<file path=ppt/slideMasters/slideMaster1.xml><?xml version="1.0" encoding="utf-8"?>
+<file path=ppt\slideMasters\slideMaster1.xml><?xml version="1.0" encoding="utf-8"?>
 <p:sldMaster xmlns:p="http://schemas.openxmlformats.org/presentationml/2006/main">
   <p:cSld name="Master">
     <p:bg>
@@ -1486,7 +1525,7 @@
 </p:sldMaster>
 </file>
 
-<file path=ppt/slideMasters/theme/theme2.xml><?xml version="1.0" encoding="utf-8"?>
+<file path=ppt\slideMasters\theme\theme2.xml><?xml version="1.0" encoding="utf-8"?>
 <a:theme xmlns:a="http://schemas.openxmlformats.org/drawingml/2006/main" name="ChatGPT">
   <a:themeElements>
     <a:clrScheme name="ChatGPT">
@@ -1731,7 +1770,7 @@
 </a:theme>
 </file>
 
-<file path=ppt/slides/slide1.xml><?xml version="1.0" encoding="utf-8"?>
+<file path=ppt\slides\slide1.xml><?xml version="1.0" encoding="utf-8"?>
 <p:sld xmlns:p="http://schemas.openxmlformats.org/presentationml/2006/main">
   <p:cSld>
     <p:bg>
@@ -3258,7 +3297,7 @@
 </p:sld>
 </file>
 
-<file path=ppt/slides/slide10.xml><?xml version="1.0" encoding="utf-8"?>
+<file path=ppt\slides\slide10.xml><?xml version="1.0" encoding="utf-8"?>
 <p:sld xmlns:p="http://schemas.openxmlformats.org/presentationml/2006/main">
   <p:cSld>
     <p:bg>
@@ -4529,7 +4568,2236 @@
 </p:sld>
 </file>
 
-<file path=ppt/slides/slide2.xml><?xml version="1.0" encoding="utf-8"?>
+<file path=ppt\slides\slide11.xml><?xml version="1.0" encoding="utf-8"?>
+<p:sld xmlns:a="http://schemas.openxmlformats.org/drawingml/2006/main" xmlns:r="http://schemas.openxmlformats.org/officeDocument/2006/relationships" xmlns:p="http://schemas.openxmlformats.org/presentationml/2006/main">
+  <p:cSld>
+    <p:bg>
+      <p:bgPr>
+        <a:solidFill>
+          <a:srgbClr val="07111F"/>
+        </a:solidFill>
+      </p:bgPr>
+    </p:bg>
+    <p:spTree>
+      <p:nvGrpSpPr>
+        <p:cNvPr id="1" name=""/>
+        <p:cNvGrpSpPr/>
+        <p:nvPr/>
+      </p:nvGrpSpPr>
+      <p:grpSpPr>
+        <a:xfrm/>
+      </p:grpSpPr>
+      <p:sp>
+        <p:nvSpPr>
+          <p:cNvPr id="2" name="grid-v-0"/>
+          <p:cNvSpPr/>
+          <p:nvPr/>
+        </p:nvSpPr>
+        <p:spPr>
+          <a:xfrm>
+            <a:off x="0" y="0"/>
+            <a:ext cx="9525" cy="6858000"/>
+          </a:xfrm>
+          <a:prstGeom prst="roundRect">
+            <a:avLst>
+              <a:gd name="adj" fmla="val 16667"/>
+            </a:avLst>
+          </a:prstGeom>
+          <a:solidFill>
+            <a:srgbClr val="0D1B2E"/>
+          </a:solidFill>
+          <a:ln w="12700">
+            <a:solidFill>
+              <a:srgbClr val="0D1B2E"/>
+            </a:solidFill>
+            <a:prstDash val="solid"/>
+          </a:ln>
+        </p:spPr>
+        <p:txBody>
+          <a:bodyPr anchor="mid" wrap="square" lIns="91440" rIns="91440" tIns="45720" bIns="45720"/>
+          <a:lstStyle/>
+          <a:p>
+            <a:pPr algn="ctr">
+              <a:defRPr sz="100" b="0">
+                <a:solidFill>
+                  <a:srgbClr val="0D1B2E"/>
+                </a:solidFill>
+                <a:latin typeface="Aptos"/>
+              </a:defRPr>
+            </a:pPr>
+            <a:r>
+              <a:rPr sz="100" b="0">
+                <a:solidFill>
+                  <a:srgbClr val="0D1B2E"/>
+                </a:solidFill>
+                <a:latin typeface="Aptos"/>
+              </a:rPr>
+              <a:t/>
+            </a:r>
+          </a:p>
+        </p:txBody>
+      </p:sp>
+      <p:sp>
+        <p:nvSpPr>
+          <p:cNvPr id="3" name="grid-v-80"/>
+          <p:cNvSpPr/>
+          <p:nvPr/>
+        </p:nvSpPr>
+        <p:spPr>
+          <a:xfrm>
+            <a:off x="762000" y="0"/>
+            <a:ext cx="9525" cy="6858000"/>
+          </a:xfrm>
+          <a:prstGeom prst="roundRect">
+            <a:avLst>
+              <a:gd name="adj" fmla="val 16667"/>
+            </a:avLst>
+          </a:prstGeom>
+          <a:solidFill>
+            <a:srgbClr val="0D1B2E"/>
+          </a:solidFill>
+          <a:ln w="12700">
+            <a:solidFill>
+              <a:srgbClr val="0D1B2E"/>
+            </a:solidFill>
+            <a:prstDash val="solid"/>
+          </a:ln>
+        </p:spPr>
+        <p:txBody>
+          <a:bodyPr anchor="mid" wrap="square" lIns="91440" rIns="91440" tIns="45720" bIns="45720"/>
+          <a:lstStyle/>
+          <a:p>
+            <a:pPr algn="ctr">
+              <a:defRPr sz="100" b="0">
+                <a:solidFill>
+                  <a:srgbClr val="0D1B2E"/>
+                </a:solidFill>
+                <a:latin typeface="Aptos"/>
+              </a:defRPr>
+            </a:pPr>
+            <a:r>
+              <a:rPr sz="100" b="0">
+                <a:solidFill>
+                  <a:srgbClr val="0D1B2E"/>
+                </a:solidFill>
+                <a:latin typeface="Aptos"/>
+              </a:rPr>
+              <a:t/>
+            </a:r>
+          </a:p>
+        </p:txBody>
+      </p:sp>
+      <p:sp>
+        <p:nvSpPr>
+          <p:cNvPr id="4" name="grid-v-160"/>
+          <p:cNvSpPr/>
+          <p:nvPr/>
+        </p:nvSpPr>
+        <p:spPr>
+          <a:xfrm>
+            <a:off x="1524000" y="0"/>
+            <a:ext cx="9525" cy="6858000"/>
+          </a:xfrm>
+          <a:prstGeom prst="roundRect">
+            <a:avLst>
+              <a:gd name="adj" fmla="val 16667"/>
+            </a:avLst>
+          </a:prstGeom>
+          <a:solidFill>
+            <a:srgbClr val="0D1B2E"/>
+          </a:solidFill>
+          <a:ln w="12700">
+            <a:solidFill>
+              <a:srgbClr val="0D1B2E"/>
+            </a:solidFill>
+            <a:prstDash val="solid"/>
+          </a:ln>
+        </p:spPr>
+        <p:txBody>
+          <a:bodyPr anchor="mid" wrap="square" lIns="91440" rIns="91440" tIns="45720" bIns="45720"/>
+          <a:lstStyle/>
+          <a:p>
+            <a:pPr algn="ctr">
+              <a:defRPr sz="100" b="0">
+                <a:solidFill>
+                  <a:srgbClr val="0D1B2E"/>
+                </a:solidFill>
+                <a:latin typeface="Aptos"/>
+              </a:defRPr>
+            </a:pPr>
+            <a:r>
+              <a:rPr sz="100" b="0">
+                <a:solidFill>
+                  <a:srgbClr val="0D1B2E"/>
+                </a:solidFill>
+                <a:latin typeface="Aptos"/>
+              </a:rPr>
+              <a:t/>
+            </a:r>
+          </a:p>
+        </p:txBody>
+      </p:sp>
+      <p:sp>
+        <p:nvSpPr>
+          <p:cNvPr id="5" name="grid-v-240"/>
+          <p:cNvSpPr/>
+          <p:nvPr/>
+        </p:nvSpPr>
+        <p:spPr>
+          <a:xfrm>
+            <a:off x="2286000" y="0"/>
+            <a:ext cx="9525" cy="6858000"/>
+          </a:xfrm>
+          <a:prstGeom prst="roundRect">
+            <a:avLst>
+              <a:gd name="adj" fmla="val 16667"/>
+            </a:avLst>
+          </a:prstGeom>
+          <a:solidFill>
+            <a:srgbClr val="0D1B2E"/>
+          </a:solidFill>
+          <a:ln w="12700">
+            <a:solidFill>
+              <a:srgbClr val="0D1B2E"/>
+            </a:solidFill>
+            <a:prstDash val="solid"/>
+          </a:ln>
+        </p:spPr>
+        <p:txBody>
+          <a:bodyPr anchor="mid" wrap="square" lIns="91440" rIns="91440" tIns="45720" bIns="45720"/>
+          <a:lstStyle/>
+          <a:p>
+            <a:pPr algn="ctr">
+              <a:defRPr sz="100" b="0">
+                <a:solidFill>
+                  <a:srgbClr val="0D1B2E"/>
+                </a:solidFill>
+                <a:latin typeface="Aptos"/>
+              </a:defRPr>
+            </a:pPr>
+            <a:r>
+              <a:rPr sz="100" b="0">
+                <a:solidFill>
+                  <a:srgbClr val="0D1B2E"/>
+                </a:solidFill>
+                <a:latin typeface="Aptos"/>
+              </a:rPr>
+              <a:t/>
+            </a:r>
+          </a:p>
+        </p:txBody>
+      </p:sp>
+      <p:sp>
+        <p:nvSpPr>
+          <p:cNvPr id="6" name="grid-v-320"/>
+          <p:cNvSpPr/>
+          <p:nvPr/>
+        </p:nvSpPr>
+        <p:spPr>
+          <a:xfrm>
+            <a:off x="3048000" y="0"/>
+            <a:ext cx="9525" cy="6858000"/>
+          </a:xfrm>
+          <a:prstGeom prst="roundRect">
+            <a:avLst>
+              <a:gd name="adj" fmla="val 16667"/>
+            </a:avLst>
+          </a:prstGeom>
+          <a:solidFill>
+            <a:srgbClr val="0D1B2E"/>
+          </a:solidFill>
+          <a:ln w="12700">
+            <a:solidFill>
+              <a:srgbClr val="0D1B2E"/>
+            </a:solidFill>
+            <a:prstDash val="solid"/>
+          </a:ln>
+        </p:spPr>
+        <p:txBody>
+          <a:bodyPr anchor="mid" wrap="square" lIns="91440" rIns="91440" tIns="45720" bIns="45720"/>
+          <a:lstStyle/>
+          <a:p>
+            <a:pPr algn="ctr">
+              <a:defRPr sz="100" b="0">
+                <a:solidFill>
+                  <a:srgbClr val="0D1B2E"/>
+                </a:solidFill>
+                <a:latin typeface="Aptos"/>
+              </a:defRPr>
+            </a:pPr>
+            <a:r>
+              <a:rPr sz="100" b="0">
+                <a:solidFill>
+                  <a:srgbClr val="0D1B2E"/>
+                </a:solidFill>
+                <a:latin typeface="Aptos"/>
+              </a:rPr>
+              <a:t/>
+            </a:r>
+          </a:p>
+        </p:txBody>
+      </p:sp>
+      <p:sp>
+        <p:nvSpPr>
+          <p:cNvPr id="7" name="grid-v-400"/>
+          <p:cNvSpPr/>
+          <p:nvPr/>
+        </p:nvSpPr>
+        <p:spPr>
+          <a:xfrm>
+            <a:off x="3810000" y="0"/>
+            <a:ext cx="9525" cy="6858000"/>
+          </a:xfrm>
+          <a:prstGeom prst="roundRect">
+            <a:avLst>
+              <a:gd name="adj" fmla="val 16667"/>
+            </a:avLst>
+          </a:prstGeom>
+          <a:solidFill>
+            <a:srgbClr val="0D1B2E"/>
+          </a:solidFill>
+          <a:ln w="12700">
+            <a:solidFill>
+              <a:srgbClr val="0D1B2E"/>
+            </a:solidFill>
+            <a:prstDash val="solid"/>
+          </a:ln>
+        </p:spPr>
+        <p:txBody>
+          <a:bodyPr anchor="mid" wrap="square" lIns="91440" rIns="91440" tIns="45720" bIns="45720"/>
+          <a:lstStyle/>
+          <a:p>
+            <a:pPr algn="ctr">
+              <a:defRPr sz="100" b="0">
+                <a:solidFill>
+                  <a:srgbClr val="0D1B2E"/>
+                </a:solidFill>
+                <a:latin typeface="Aptos"/>
+              </a:defRPr>
+            </a:pPr>
+            <a:r>
+              <a:rPr sz="100" b="0">
+                <a:solidFill>
+                  <a:srgbClr val="0D1B2E"/>
+                </a:solidFill>
+                <a:latin typeface="Aptos"/>
+              </a:rPr>
+              <a:t/>
+            </a:r>
+          </a:p>
+        </p:txBody>
+      </p:sp>
+      <p:sp>
+        <p:nvSpPr>
+          <p:cNvPr id="8" name="grid-v-480"/>
+          <p:cNvSpPr/>
+          <p:nvPr/>
+        </p:nvSpPr>
+        <p:spPr>
+          <a:xfrm>
+            <a:off x="4572000" y="0"/>
+            <a:ext cx="9525" cy="6858000"/>
+          </a:xfrm>
+          <a:prstGeom prst="roundRect">
+            <a:avLst>
+              <a:gd name="adj" fmla="val 16667"/>
+            </a:avLst>
+          </a:prstGeom>
+          <a:solidFill>
+            <a:srgbClr val="0D1B2E"/>
+          </a:solidFill>
+          <a:ln w="12700">
+            <a:solidFill>
+              <a:srgbClr val="0D1B2E"/>
+            </a:solidFill>
+            <a:prstDash val="solid"/>
+          </a:ln>
+        </p:spPr>
+        <p:txBody>
+          <a:bodyPr anchor="mid" wrap="square" lIns="91440" rIns="91440" tIns="45720" bIns="45720"/>
+          <a:lstStyle/>
+          <a:p>
+            <a:pPr algn="ctr">
+              <a:defRPr sz="100" b="0">
+                <a:solidFill>
+                  <a:srgbClr val="0D1B2E"/>
+                </a:solidFill>
+                <a:latin typeface="Aptos"/>
+              </a:defRPr>
+            </a:pPr>
+            <a:r>
+              <a:rPr sz="100" b="0">
+                <a:solidFill>
+                  <a:srgbClr val="0D1B2E"/>
+                </a:solidFill>
+                <a:latin typeface="Aptos"/>
+              </a:rPr>
+              <a:t/>
+            </a:r>
+          </a:p>
+        </p:txBody>
+      </p:sp>
+      <p:sp>
+        <p:nvSpPr>
+          <p:cNvPr id="9" name="grid-v-560"/>
+          <p:cNvSpPr/>
+          <p:nvPr/>
+        </p:nvSpPr>
+        <p:spPr>
+          <a:xfrm>
+            <a:off x="5334000" y="0"/>
+            <a:ext cx="9525" cy="6858000"/>
+          </a:xfrm>
+          <a:prstGeom prst="roundRect">
+            <a:avLst>
+              <a:gd name="adj" fmla="val 16667"/>
+            </a:avLst>
+          </a:prstGeom>
+          <a:solidFill>
+            <a:srgbClr val="0D1B2E"/>
+          </a:solidFill>
+          <a:ln w="12700">
+            <a:solidFill>
+              <a:srgbClr val="0D1B2E"/>
+            </a:solidFill>
+            <a:prstDash val="solid"/>
+          </a:ln>
+        </p:spPr>
+        <p:txBody>
+          <a:bodyPr anchor="mid" wrap="square" lIns="91440" rIns="91440" tIns="45720" bIns="45720"/>
+          <a:lstStyle/>
+          <a:p>
+            <a:pPr algn="ctr">
+              <a:defRPr sz="100" b="0">
+                <a:solidFill>
+                  <a:srgbClr val="0D1B2E"/>
+                </a:solidFill>
+                <a:latin typeface="Aptos"/>
+              </a:defRPr>
+            </a:pPr>
+            <a:r>
+              <a:rPr sz="100" b="0">
+                <a:solidFill>
+                  <a:srgbClr val="0D1B2E"/>
+                </a:solidFill>
+                <a:latin typeface="Aptos"/>
+              </a:rPr>
+              <a:t/>
+            </a:r>
+          </a:p>
+        </p:txBody>
+      </p:sp>
+      <p:sp>
+        <p:nvSpPr>
+          <p:cNvPr id="10" name="grid-v-640"/>
+          <p:cNvSpPr/>
+          <p:nvPr/>
+        </p:nvSpPr>
+        <p:spPr>
+          <a:xfrm>
+            <a:off x="6096000" y="0"/>
+            <a:ext cx="9525" cy="6858000"/>
+          </a:xfrm>
+          <a:prstGeom prst="roundRect">
+            <a:avLst>
+              <a:gd name="adj" fmla="val 16667"/>
+            </a:avLst>
+          </a:prstGeom>
+          <a:solidFill>
+            <a:srgbClr val="0D1B2E"/>
+          </a:solidFill>
+          <a:ln w="12700">
+            <a:solidFill>
+              <a:srgbClr val="0D1B2E"/>
+            </a:solidFill>
+            <a:prstDash val="solid"/>
+          </a:ln>
+        </p:spPr>
+        <p:txBody>
+          <a:bodyPr anchor="mid" wrap="square" lIns="91440" rIns="91440" tIns="45720" bIns="45720"/>
+          <a:lstStyle/>
+          <a:p>
+            <a:pPr algn="ctr">
+              <a:defRPr sz="100" b="0">
+                <a:solidFill>
+                  <a:srgbClr val="0D1B2E"/>
+                </a:solidFill>
+                <a:latin typeface="Aptos"/>
+              </a:defRPr>
+            </a:pPr>
+            <a:r>
+              <a:rPr sz="100" b="0">
+                <a:solidFill>
+                  <a:srgbClr val="0D1B2E"/>
+                </a:solidFill>
+                <a:latin typeface="Aptos"/>
+              </a:rPr>
+              <a:t/>
+            </a:r>
+          </a:p>
+        </p:txBody>
+      </p:sp>
+      <p:sp>
+        <p:nvSpPr>
+          <p:cNvPr id="11" name="grid-v-720"/>
+          <p:cNvSpPr/>
+          <p:nvPr/>
+        </p:nvSpPr>
+        <p:spPr>
+          <a:xfrm>
+            <a:off x="6858000" y="0"/>
+            <a:ext cx="9525" cy="6858000"/>
+          </a:xfrm>
+          <a:prstGeom prst="roundRect">
+            <a:avLst>
+              <a:gd name="adj" fmla="val 16667"/>
+            </a:avLst>
+          </a:prstGeom>
+          <a:solidFill>
+            <a:srgbClr val="0D1B2E"/>
+          </a:solidFill>
+          <a:ln w="12700">
+            <a:solidFill>
+              <a:srgbClr val="0D1B2E"/>
+            </a:solidFill>
+            <a:prstDash val="solid"/>
+          </a:ln>
+        </p:spPr>
+        <p:txBody>
+          <a:bodyPr anchor="mid" wrap="square" lIns="91440" rIns="91440" tIns="45720" bIns="45720"/>
+          <a:lstStyle/>
+          <a:p>
+            <a:pPr algn="ctr">
+              <a:defRPr sz="100" b="0">
+                <a:solidFill>
+                  <a:srgbClr val="0D1B2E"/>
+                </a:solidFill>
+                <a:latin typeface="Aptos"/>
+              </a:defRPr>
+            </a:pPr>
+            <a:r>
+              <a:rPr sz="100" b="0">
+                <a:solidFill>
+                  <a:srgbClr val="0D1B2E"/>
+                </a:solidFill>
+                <a:latin typeface="Aptos"/>
+              </a:rPr>
+              <a:t/>
+            </a:r>
+          </a:p>
+        </p:txBody>
+      </p:sp>
+      <p:sp>
+        <p:nvSpPr>
+          <p:cNvPr id="12" name="grid-v-800"/>
+          <p:cNvSpPr/>
+          <p:nvPr/>
+        </p:nvSpPr>
+        <p:spPr>
+          <a:xfrm>
+            <a:off x="7620000" y="0"/>
+            <a:ext cx="9525" cy="6858000"/>
+          </a:xfrm>
+          <a:prstGeom prst="roundRect">
+            <a:avLst>
+              <a:gd name="adj" fmla="val 16667"/>
+            </a:avLst>
+          </a:prstGeom>
+          <a:solidFill>
+            <a:srgbClr val="0D1B2E"/>
+          </a:solidFill>
+          <a:ln w="12700">
+            <a:solidFill>
+              <a:srgbClr val="0D1B2E"/>
+            </a:solidFill>
+            <a:prstDash val="solid"/>
+          </a:ln>
+        </p:spPr>
+        <p:txBody>
+          <a:bodyPr anchor="mid" wrap="square" lIns="91440" rIns="91440" tIns="45720" bIns="45720"/>
+          <a:lstStyle/>
+          <a:p>
+            <a:pPr algn="ctr">
+              <a:defRPr sz="100" b="0">
+                <a:solidFill>
+                  <a:srgbClr val="0D1B2E"/>
+                </a:solidFill>
+                <a:latin typeface="Aptos"/>
+              </a:defRPr>
+            </a:pPr>
+            <a:r>
+              <a:rPr sz="100" b="0">
+                <a:solidFill>
+                  <a:srgbClr val="0D1B2E"/>
+                </a:solidFill>
+                <a:latin typeface="Aptos"/>
+              </a:rPr>
+              <a:t/>
+            </a:r>
+          </a:p>
+        </p:txBody>
+      </p:sp>
+      <p:sp>
+        <p:nvSpPr>
+          <p:cNvPr id="13" name="grid-v-880"/>
+          <p:cNvSpPr/>
+          <p:nvPr/>
+        </p:nvSpPr>
+        <p:spPr>
+          <a:xfrm>
+            <a:off x="8382000" y="0"/>
+            <a:ext cx="9525" cy="6858000"/>
+          </a:xfrm>
+          <a:prstGeom prst="roundRect">
+            <a:avLst>
+              <a:gd name="adj" fmla="val 16667"/>
+            </a:avLst>
+          </a:prstGeom>
+          <a:solidFill>
+            <a:srgbClr val="0D1B2E"/>
+          </a:solidFill>
+          <a:ln w="12700">
+            <a:solidFill>
+              <a:srgbClr val="0D1B2E"/>
+            </a:solidFill>
+            <a:prstDash val="solid"/>
+          </a:ln>
+        </p:spPr>
+        <p:txBody>
+          <a:bodyPr anchor="mid" wrap="square" lIns="91440" rIns="91440" tIns="45720" bIns="45720"/>
+          <a:lstStyle/>
+          <a:p>
+            <a:pPr algn="ctr">
+              <a:defRPr sz="100" b="0">
+                <a:solidFill>
+                  <a:srgbClr val="0D1B2E"/>
+                </a:solidFill>
+                <a:latin typeface="Aptos"/>
+              </a:defRPr>
+            </a:pPr>
+            <a:r>
+              <a:rPr sz="100" b="0">
+                <a:solidFill>
+                  <a:srgbClr val="0D1B2E"/>
+                </a:solidFill>
+                <a:latin typeface="Aptos"/>
+              </a:rPr>
+              <a:t/>
+            </a:r>
+          </a:p>
+        </p:txBody>
+      </p:sp>
+      <p:sp>
+        <p:nvSpPr>
+          <p:cNvPr id="14" name="grid-v-960"/>
+          <p:cNvSpPr/>
+          <p:nvPr/>
+        </p:nvSpPr>
+        <p:spPr>
+          <a:xfrm>
+            <a:off x="9144000" y="0"/>
+            <a:ext cx="9525" cy="6858000"/>
+          </a:xfrm>
+          <a:prstGeom prst="roundRect">
+            <a:avLst>
+              <a:gd name="adj" fmla="val 16667"/>
+            </a:avLst>
+          </a:prstGeom>
+          <a:solidFill>
+            <a:srgbClr val="0D1B2E"/>
+          </a:solidFill>
+          <a:ln w="12700">
+            <a:solidFill>
+              <a:srgbClr val="0D1B2E"/>
+            </a:solidFill>
+            <a:prstDash val="solid"/>
+          </a:ln>
+        </p:spPr>
+        <p:txBody>
+          <a:bodyPr anchor="mid" wrap="square" lIns="91440" rIns="91440" tIns="45720" bIns="45720"/>
+          <a:lstStyle/>
+          <a:p>
+            <a:pPr algn="ctr">
+              <a:defRPr sz="100" b="0">
+                <a:solidFill>
+                  <a:srgbClr val="0D1B2E"/>
+                </a:solidFill>
+                <a:latin typeface="Aptos"/>
+              </a:defRPr>
+            </a:pPr>
+            <a:r>
+              <a:rPr sz="100" b="0">
+                <a:solidFill>
+                  <a:srgbClr val="0D1B2E"/>
+                </a:solidFill>
+                <a:latin typeface="Aptos"/>
+              </a:rPr>
+              <a:t/>
+            </a:r>
+          </a:p>
+        </p:txBody>
+      </p:sp>
+      <p:sp>
+        <p:nvSpPr>
+          <p:cNvPr id="15" name="grid-v-1040"/>
+          <p:cNvSpPr/>
+          <p:nvPr/>
+        </p:nvSpPr>
+        <p:spPr>
+          <a:xfrm>
+            <a:off x="9906000" y="0"/>
+            <a:ext cx="9525" cy="6858000"/>
+          </a:xfrm>
+          <a:prstGeom prst="roundRect">
+            <a:avLst>
+              <a:gd name="adj" fmla="val 16667"/>
+            </a:avLst>
+          </a:prstGeom>
+          <a:solidFill>
+            <a:srgbClr val="0D1B2E"/>
+          </a:solidFill>
+          <a:ln w="12700">
+            <a:solidFill>
+              <a:srgbClr val="0D1B2E"/>
+            </a:solidFill>
+            <a:prstDash val="solid"/>
+          </a:ln>
+        </p:spPr>
+        <p:txBody>
+          <a:bodyPr anchor="mid" wrap="square" lIns="91440" rIns="91440" tIns="45720" bIns="45720"/>
+          <a:lstStyle/>
+          <a:p>
+            <a:pPr algn="ctr">
+              <a:defRPr sz="100" b="0">
+                <a:solidFill>
+                  <a:srgbClr val="0D1B2E"/>
+                </a:solidFill>
+                <a:latin typeface="Aptos"/>
+              </a:defRPr>
+            </a:pPr>
+            <a:r>
+              <a:rPr sz="100" b="0">
+                <a:solidFill>
+                  <a:srgbClr val="0D1B2E"/>
+                </a:solidFill>
+                <a:latin typeface="Aptos"/>
+              </a:rPr>
+              <a:t/>
+            </a:r>
+          </a:p>
+        </p:txBody>
+      </p:sp>
+      <p:sp>
+        <p:nvSpPr>
+          <p:cNvPr id="16" name="grid-v-1120"/>
+          <p:cNvSpPr/>
+          <p:nvPr/>
+        </p:nvSpPr>
+        <p:spPr>
+          <a:xfrm>
+            <a:off x="10668000" y="0"/>
+            <a:ext cx="9525" cy="6858000"/>
+          </a:xfrm>
+          <a:prstGeom prst="roundRect">
+            <a:avLst>
+              <a:gd name="adj" fmla="val 16667"/>
+            </a:avLst>
+          </a:prstGeom>
+          <a:solidFill>
+            <a:srgbClr val="0D1B2E"/>
+          </a:solidFill>
+          <a:ln w="12700">
+            <a:solidFill>
+              <a:srgbClr val="0D1B2E"/>
+            </a:solidFill>
+            <a:prstDash val="solid"/>
+          </a:ln>
+        </p:spPr>
+        <p:txBody>
+          <a:bodyPr anchor="mid" wrap="square" lIns="91440" rIns="91440" tIns="45720" bIns="45720"/>
+          <a:lstStyle/>
+          <a:p>
+            <a:pPr algn="ctr">
+              <a:defRPr sz="100" b="0">
+                <a:solidFill>
+                  <a:srgbClr val="0D1B2E"/>
+                </a:solidFill>
+                <a:latin typeface="Aptos"/>
+              </a:defRPr>
+            </a:pPr>
+            <a:r>
+              <a:rPr sz="100" b="0">
+                <a:solidFill>
+                  <a:srgbClr val="0D1B2E"/>
+                </a:solidFill>
+                <a:latin typeface="Aptos"/>
+              </a:rPr>
+              <a:t/>
+            </a:r>
+          </a:p>
+        </p:txBody>
+      </p:sp>
+      <p:sp>
+        <p:nvSpPr>
+          <p:cNvPr id="17" name="grid-v-1200"/>
+          <p:cNvSpPr/>
+          <p:nvPr/>
+        </p:nvSpPr>
+        <p:spPr>
+          <a:xfrm>
+            <a:off x="11430000" y="0"/>
+            <a:ext cx="9525" cy="6858000"/>
+          </a:xfrm>
+          <a:prstGeom prst="roundRect">
+            <a:avLst>
+              <a:gd name="adj" fmla="val 16667"/>
+            </a:avLst>
+          </a:prstGeom>
+          <a:solidFill>
+            <a:srgbClr val="0D1B2E"/>
+          </a:solidFill>
+          <a:ln w="12700">
+            <a:solidFill>
+              <a:srgbClr val="0D1B2E"/>
+            </a:solidFill>
+            <a:prstDash val="solid"/>
+          </a:ln>
+        </p:spPr>
+        <p:txBody>
+          <a:bodyPr anchor="mid" wrap="square" lIns="91440" rIns="91440" tIns="45720" bIns="45720"/>
+          <a:lstStyle/>
+          <a:p>
+            <a:pPr algn="ctr">
+              <a:defRPr sz="100" b="0">
+                <a:solidFill>
+                  <a:srgbClr val="0D1B2E"/>
+                </a:solidFill>
+                <a:latin typeface="Aptos"/>
+              </a:defRPr>
+            </a:pPr>
+            <a:r>
+              <a:rPr sz="100" b="0">
+                <a:solidFill>
+                  <a:srgbClr val="0D1B2E"/>
+                </a:solidFill>
+                <a:latin typeface="Aptos"/>
+              </a:rPr>
+              <a:t/>
+            </a:r>
+          </a:p>
+        </p:txBody>
+      </p:sp>
+      <p:sp>
+        <p:nvSpPr>
+          <p:cNvPr id="18" name="grid-v-1280"/>
+          <p:cNvSpPr/>
+          <p:nvPr/>
+        </p:nvSpPr>
+        <p:spPr>
+          <a:xfrm>
+            <a:off x="12192000" y="0"/>
+            <a:ext cx="9525" cy="6858000"/>
+          </a:xfrm>
+          <a:prstGeom prst="roundRect">
+            <a:avLst>
+              <a:gd name="adj" fmla="val 16667"/>
+            </a:avLst>
+          </a:prstGeom>
+          <a:solidFill>
+            <a:srgbClr val="0D1B2E"/>
+          </a:solidFill>
+          <a:ln w="12700">
+            <a:solidFill>
+              <a:srgbClr val="0D1B2E"/>
+            </a:solidFill>
+            <a:prstDash val="solid"/>
+          </a:ln>
+        </p:spPr>
+        <p:txBody>
+          <a:bodyPr anchor="mid" wrap="square" lIns="91440" rIns="91440" tIns="45720" bIns="45720"/>
+          <a:lstStyle/>
+          <a:p>
+            <a:pPr algn="ctr">
+              <a:defRPr sz="100" b="0">
+                <a:solidFill>
+                  <a:srgbClr val="0D1B2E"/>
+                </a:solidFill>
+                <a:latin typeface="Aptos"/>
+              </a:defRPr>
+            </a:pPr>
+            <a:r>
+              <a:rPr sz="100" b="0">
+                <a:solidFill>
+                  <a:srgbClr val="0D1B2E"/>
+                </a:solidFill>
+                <a:latin typeface="Aptos"/>
+              </a:rPr>
+              <a:t/>
+            </a:r>
+          </a:p>
+        </p:txBody>
+      </p:sp>
+      <p:sp>
+        <p:nvSpPr>
+          <p:cNvPr id="19" name="grid-h-0"/>
+          <p:cNvSpPr/>
+          <p:nvPr/>
+        </p:nvSpPr>
+        <p:spPr>
+          <a:xfrm>
+            <a:off x="0" y="0"/>
+            <a:ext cx="12192000" cy="9525"/>
+          </a:xfrm>
+          <a:prstGeom prst="roundRect">
+            <a:avLst>
+              <a:gd name="adj" fmla="val 16667"/>
+            </a:avLst>
+          </a:prstGeom>
+          <a:solidFill>
+            <a:srgbClr val="0D1B2E"/>
+          </a:solidFill>
+          <a:ln w="12700">
+            <a:solidFill>
+              <a:srgbClr val="0D1B2E"/>
+            </a:solidFill>
+            <a:prstDash val="solid"/>
+          </a:ln>
+        </p:spPr>
+        <p:txBody>
+          <a:bodyPr anchor="mid" wrap="square" lIns="91440" rIns="91440" tIns="45720" bIns="45720"/>
+          <a:lstStyle/>
+          <a:p>
+            <a:pPr algn="ctr">
+              <a:defRPr sz="100" b="1">
+                <a:solidFill>
+                  <a:srgbClr val="0D1B2E"/>
+                </a:solidFill>
+                <a:latin typeface="Aptos"/>
+              </a:defRPr>
+            </a:pPr>
+            <a:r>
+              <a:rPr sz="100" b="1">
+                <a:solidFill>
+                  <a:srgbClr val="0D1B2E"/>
+                </a:solidFill>
+                <a:latin typeface="Aptos"/>
+              </a:rPr>
+              <a:t/>
+            </a:r>
+          </a:p>
+        </p:txBody>
+      </p:sp>
+      <p:sp>
+        <p:nvSpPr>
+          <p:cNvPr id="20" name="grid-h-80"/>
+          <p:cNvSpPr/>
+          <p:nvPr/>
+        </p:nvSpPr>
+        <p:spPr>
+          <a:xfrm>
+            <a:off x="0" y="762000"/>
+            <a:ext cx="12192000" cy="9525"/>
+          </a:xfrm>
+          <a:prstGeom prst="roundRect">
+            <a:avLst>
+              <a:gd name="adj" fmla="val 16667"/>
+            </a:avLst>
+          </a:prstGeom>
+          <a:solidFill>
+            <a:srgbClr val="0D1B2E"/>
+          </a:solidFill>
+          <a:ln w="12700">
+            <a:solidFill>
+              <a:srgbClr val="0D1B2E"/>
+            </a:solidFill>
+            <a:prstDash val="solid"/>
+          </a:ln>
+        </p:spPr>
+        <p:txBody>
+          <a:bodyPr anchor="mid" wrap="square" lIns="91440" rIns="91440" tIns="45720" bIns="45720"/>
+          <a:lstStyle/>
+          <a:p>
+            <a:pPr algn="ctr">
+              <a:defRPr sz="100" b="1">
+                <a:solidFill>
+                  <a:srgbClr val="0D1B2E"/>
+                </a:solidFill>
+                <a:latin typeface="Aptos"/>
+              </a:defRPr>
+            </a:pPr>
+            <a:r>
+              <a:rPr sz="100" b="1">
+                <a:solidFill>
+                  <a:srgbClr val="0D1B2E"/>
+                </a:solidFill>
+                <a:latin typeface="Aptos"/>
+              </a:rPr>
+              <a:t/>
+            </a:r>
+          </a:p>
+        </p:txBody>
+      </p:sp>
+      <p:sp>
+        <p:nvSpPr>
+          <p:cNvPr id="21" name="grid-h-160"/>
+          <p:cNvSpPr/>
+          <p:nvPr/>
+        </p:nvSpPr>
+        <p:spPr>
+          <a:xfrm>
+            <a:off x="0" y="1524000"/>
+            <a:ext cx="12192000" cy="9525"/>
+          </a:xfrm>
+          <a:prstGeom prst="roundRect">
+            <a:avLst>
+              <a:gd name="adj" fmla="val 16667"/>
+            </a:avLst>
+          </a:prstGeom>
+          <a:solidFill>
+            <a:srgbClr val="0D1B2E"/>
+          </a:solidFill>
+          <a:ln w="12700">
+            <a:solidFill>
+              <a:srgbClr val="0D1B2E"/>
+            </a:solidFill>
+            <a:prstDash val="solid"/>
+          </a:ln>
+        </p:spPr>
+        <p:txBody>
+          <a:bodyPr anchor="mid" wrap="square" lIns="91440" rIns="91440" tIns="45720" bIns="45720"/>
+          <a:lstStyle/>
+          <a:p>
+            <a:pPr algn="ctr">
+              <a:defRPr sz="100" b="1">
+                <a:solidFill>
+                  <a:srgbClr val="0D1B2E"/>
+                </a:solidFill>
+                <a:latin typeface="Aptos"/>
+              </a:defRPr>
+            </a:pPr>
+            <a:r>
+              <a:rPr sz="100" b="1">
+                <a:solidFill>
+                  <a:srgbClr val="0D1B2E"/>
+                </a:solidFill>
+                <a:latin typeface="Aptos"/>
+              </a:rPr>
+              <a:t/>
+            </a:r>
+          </a:p>
+        </p:txBody>
+      </p:sp>
+      <p:sp>
+        <p:nvSpPr>
+          <p:cNvPr id="22" name="grid-h-240"/>
+          <p:cNvSpPr/>
+          <p:nvPr/>
+        </p:nvSpPr>
+        <p:spPr>
+          <a:xfrm>
+            <a:off x="0" y="2286000"/>
+            <a:ext cx="12192000" cy="9525"/>
+          </a:xfrm>
+          <a:prstGeom prst="roundRect">
+            <a:avLst>
+              <a:gd name="adj" fmla="val 16667"/>
+            </a:avLst>
+          </a:prstGeom>
+          <a:solidFill>
+            <a:srgbClr val="0D1B2E"/>
+          </a:solidFill>
+          <a:ln w="12700">
+            <a:solidFill>
+              <a:srgbClr val="0D1B2E"/>
+            </a:solidFill>
+            <a:prstDash val="solid"/>
+          </a:ln>
+        </p:spPr>
+        <p:txBody>
+          <a:bodyPr anchor="mid" wrap="square" lIns="91440" rIns="91440" tIns="45720" bIns="45720"/>
+          <a:lstStyle/>
+          <a:p>
+            <a:pPr algn="ctr">
+              <a:defRPr sz="100" b="1">
+                <a:solidFill>
+                  <a:srgbClr val="0D1B2E"/>
+                </a:solidFill>
+                <a:latin typeface="Aptos"/>
+              </a:defRPr>
+            </a:pPr>
+            <a:r>
+              <a:rPr sz="100" b="1">
+                <a:solidFill>
+                  <a:srgbClr val="0D1B2E"/>
+                </a:solidFill>
+                <a:latin typeface="Aptos"/>
+              </a:rPr>
+              <a:t/>
+            </a:r>
+          </a:p>
+        </p:txBody>
+      </p:sp>
+      <p:sp>
+        <p:nvSpPr>
+          <p:cNvPr id="23" name="grid-h-320"/>
+          <p:cNvSpPr/>
+          <p:nvPr/>
+        </p:nvSpPr>
+        <p:spPr>
+          <a:xfrm>
+            <a:off x="0" y="3048000"/>
+            <a:ext cx="12192000" cy="9525"/>
+          </a:xfrm>
+          <a:prstGeom prst="roundRect">
+            <a:avLst>
+              <a:gd name="adj" fmla="val 16667"/>
+            </a:avLst>
+          </a:prstGeom>
+          <a:solidFill>
+            <a:srgbClr val="0D1B2E"/>
+          </a:solidFill>
+          <a:ln w="12700">
+            <a:solidFill>
+              <a:srgbClr val="0D1B2E"/>
+            </a:solidFill>
+            <a:prstDash val="solid"/>
+          </a:ln>
+        </p:spPr>
+        <p:txBody>
+          <a:bodyPr anchor="mid" wrap="square" lIns="91440" rIns="91440" tIns="45720" bIns="45720"/>
+          <a:lstStyle/>
+          <a:p>
+            <a:pPr algn="ctr">
+              <a:defRPr sz="100" b="1">
+                <a:solidFill>
+                  <a:srgbClr val="0D1B2E"/>
+                </a:solidFill>
+                <a:latin typeface="Aptos"/>
+              </a:defRPr>
+            </a:pPr>
+            <a:r>
+              <a:rPr sz="100" b="1">
+                <a:solidFill>
+                  <a:srgbClr val="0D1B2E"/>
+                </a:solidFill>
+                <a:latin typeface="Aptos"/>
+              </a:rPr>
+              <a:t/>
+            </a:r>
+          </a:p>
+        </p:txBody>
+      </p:sp>
+      <p:sp>
+        <p:nvSpPr>
+          <p:cNvPr id="24" name="grid-h-400"/>
+          <p:cNvSpPr/>
+          <p:nvPr/>
+        </p:nvSpPr>
+        <p:spPr>
+          <a:xfrm>
+            <a:off x="0" y="3810000"/>
+            <a:ext cx="12192000" cy="9525"/>
+          </a:xfrm>
+          <a:prstGeom prst="roundRect">
+            <a:avLst>
+              <a:gd name="adj" fmla="val 16667"/>
+            </a:avLst>
+          </a:prstGeom>
+          <a:solidFill>
+            <a:srgbClr val="0D1B2E"/>
+          </a:solidFill>
+          <a:ln w="12700">
+            <a:solidFill>
+              <a:srgbClr val="0D1B2E"/>
+            </a:solidFill>
+            <a:prstDash val="solid"/>
+          </a:ln>
+        </p:spPr>
+        <p:txBody>
+          <a:bodyPr anchor="mid" wrap="square" lIns="91440" rIns="91440" tIns="45720" bIns="45720"/>
+          <a:lstStyle/>
+          <a:p>
+            <a:pPr algn="ctr">
+              <a:defRPr sz="100" b="1">
+                <a:solidFill>
+                  <a:srgbClr val="0D1B2E"/>
+                </a:solidFill>
+                <a:latin typeface="Aptos"/>
+              </a:defRPr>
+            </a:pPr>
+            <a:r>
+              <a:rPr sz="100" b="1">
+                <a:solidFill>
+                  <a:srgbClr val="0D1B2E"/>
+                </a:solidFill>
+                <a:latin typeface="Aptos"/>
+              </a:rPr>
+              <a:t/>
+            </a:r>
+          </a:p>
+        </p:txBody>
+      </p:sp>
+      <p:sp>
+        <p:nvSpPr>
+          <p:cNvPr id="25" name="grid-h-480"/>
+          <p:cNvSpPr/>
+          <p:nvPr/>
+        </p:nvSpPr>
+        <p:spPr>
+          <a:xfrm>
+            <a:off x="0" y="4572000"/>
+            <a:ext cx="12192000" cy="9525"/>
+          </a:xfrm>
+          <a:prstGeom prst="roundRect">
+            <a:avLst>
+              <a:gd name="adj" fmla="val 16667"/>
+            </a:avLst>
+          </a:prstGeom>
+          <a:solidFill>
+            <a:srgbClr val="0D1B2E"/>
+          </a:solidFill>
+          <a:ln w="12700">
+            <a:solidFill>
+              <a:srgbClr val="0D1B2E"/>
+            </a:solidFill>
+            <a:prstDash val="solid"/>
+          </a:ln>
+        </p:spPr>
+        <p:txBody>
+          <a:bodyPr anchor="mid" wrap="square" lIns="91440" rIns="91440" tIns="45720" bIns="45720"/>
+          <a:lstStyle/>
+          <a:p>
+            <a:pPr algn="ctr">
+              <a:defRPr sz="100" b="1">
+                <a:solidFill>
+                  <a:srgbClr val="0D1B2E"/>
+                </a:solidFill>
+                <a:latin typeface="Aptos"/>
+              </a:defRPr>
+            </a:pPr>
+            <a:r>
+              <a:rPr sz="100" b="1">
+                <a:solidFill>
+                  <a:srgbClr val="0D1B2E"/>
+                </a:solidFill>
+                <a:latin typeface="Aptos"/>
+              </a:rPr>
+              <a:t/>
+            </a:r>
+          </a:p>
+        </p:txBody>
+      </p:sp>
+      <p:sp>
+        <p:nvSpPr>
+          <p:cNvPr id="26" name="grid-h-560"/>
+          <p:cNvSpPr/>
+          <p:nvPr/>
+        </p:nvSpPr>
+        <p:spPr>
+          <a:xfrm>
+            <a:off x="0" y="5334000"/>
+            <a:ext cx="12192000" cy="9525"/>
+          </a:xfrm>
+          <a:prstGeom prst="roundRect">
+            <a:avLst>
+              <a:gd name="adj" fmla="val 16667"/>
+            </a:avLst>
+          </a:prstGeom>
+          <a:solidFill>
+            <a:srgbClr val="0D1B2E"/>
+          </a:solidFill>
+          <a:ln w="12700">
+            <a:solidFill>
+              <a:srgbClr val="0D1B2E"/>
+            </a:solidFill>
+            <a:prstDash val="solid"/>
+          </a:ln>
+        </p:spPr>
+        <p:txBody>
+          <a:bodyPr anchor="mid" wrap="square" lIns="91440" rIns="91440" tIns="45720" bIns="45720"/>
+          <a:lstStyle/>
+          <a:p>
+            <a:pPr algn="ctr">
+              <a:defRPr sz="100" b="1">
+                <a:solidFill>
+                  <a:srgbClr val="0D1B2E"/>
+                </a:solidFill>
+                <a:latin typeface="Aptos"/>
+              </a:defRPr>
+            </a:pPr>
+            <a:r>
+              <a:rPr sz="100" b="1">
+                <a:solidFill>
+                  <a:srgbClr val="0D1B2E"/>
+                </a:solidFill>
+                <a:latin typeface="Aptos"/>
+              </a:rPr>
+              <a:t/>
+            </a:r>
+          </a:p>
+        </p:txBody>
+      </p:sp>
+      <p:sp>
+        <p:nvSpPr>
+          <p:cNvPr id="27" name="grid-h-640"/>
+          <p:cNvSpPr/>
+          <p:nvPr/>
+        </p:nvSpPr>
+        <p:spPr>
+          <a:xfrm>
+            <a:off x="0" y="6096000"/>
+            <a:ext cx="12192000" cy="9525"/>
+          </a:xfrm>
+          <a:prstGeom prst="roundRect">
+            <a:avLst>
+              <a:gd name="adj" fmla="val 16667"/>
+            </a:avLst>
+          </a:prstGeom>
+          <a:solidFill>
+            <a:srgbClr val="0D1B2E"/>
+          </a:solidFill>
+          <a:ln w="12700">
+            <a:solidFill>
+              <a:srgbClr val="0D1B2E"/>
+            </a:solidFill>
+            <a:prstDash val="solid"/>
+          </a:ln>
+        </p:spPr>
+        <p:txBody>
+          <a:bodyPr anchor="mid" wrap="square" lIns="91440" rIns="91440" tIns="45720" bIns="45720"/>
+          <a:lstStyle/>
+          <a:p>
+            <a:pPr algn="ctr">
+              <a:defRPr sz="100" b="1">
+                <a:solidFill>
+                  <a:srgbClr val="0D1B2E"/>
+                </a:solidFill>
+                <a:latin typeface="Aptos"/>
+              </a:defRPr>
+            </a:pPr>
+            <a:r>
+              <a:rPr sz="100" b="1">
+                <a:solidFill>
+                  <a:srgbClr val="0D1B2E"/>
+                </a:solidFill>
+                <a:latin typeface="Aptos"/>
+              </a:rPr>
+              <a:t/>
+            </a:r>
+          </a:p>
+        </p:txBody>
+      </p:sp>
+      <p:sp>
+        <p:nvSpPr>
+          <p:cNvPr id="28" name="grid-h-720"/>
+          <p:cNvSpPr/>
+          <p:nvPr/>
+        </p:nvSpPr>
+        <p:spPr>
+          <a:xfrm>
+            <a:off x="0" y="6858000"/>
+            <a:ext cx="12192000" cy="9525"/>
+          </a:xfrm>
+          <a:prstGeom prst="roundRect">
+            <a:avLst>
+              <a:gd name="adj" fmla="val 16667"/>
+            </a:avLst>
+          </a:prstGeom>
+          <a:solidFill>
+            <a:srgbClr val="0D1B2E"/>
+          </a:solidFill>
+          <a:ln w="12700">
+            <a:solidFill>
+              <a:srgbClr val="0D1B2E"/>
+            </a:solidFill>
+            <a:prstDash val="solid"/>
+          </a:ln>
+        </p:spPr>
+        <p:txBody>
+          <a:bodyPr anchor="mid" wrap="square" lIns="91440" rIns="91440" tIns="45720" bIns="45720"/>
+          <a:lstStyle/>
+          <a:p>
+            <a:pPr algn="ctr">
+              <a:defRPr sz="100" b="1">
+                <a:solidFill>
+                  <a:srgbClr val="0D1B2E"/>
+                </a:solidFill>
+                <a:latin typeface="Aptos"/>
+              </a:defRPr>
+            </a:pPr>
+            <a:r>
+              <a:rPr sz="100" b="1">
+                <a:solidFill>
+                  <a:srgbClr val="0D1B2E"/>
+                </a:solidFill>
+                <a:latin typeface="Aptos"/>
+              </a:rPr>
+              <a:t/>
+            </a:r>
+          </a:p>
+        </p:txBody>
+      </p:sp>
+      <p:sp>
+        <p:nvSpPr>
+          <p:cNvPr id="40" name="brand"/>
+          <p:cNvSpPr txBox="1"/>
+          <p:nvPr/>
+        </p:nvSpPr>
+        <p:spPr>
+          <a:xfrm>
+            <a:off x="609600" y="381000"/>
+            <a:ext cx="1714500" cy="304800"/>
+          </a:xfrm>
+          <a:prstGeom prst="rect">
+            <a:avLst/>
+          </a:prstGeom>
+          <a:noFill/>
+          <a:ln w="0">
+            <a:noFill/>
+          </a:ln>
+        </p:spPr>
+        <p:txBody>
+          <a:bodyPr wrap="square"/>
+          <a:lstStyle/>
+          <a:p>
+            <a:pPr algn="l">
+              <a:defRPr sz="1000" b="1">
+                <a:solidFill>
+                  <a:srgbClr val="27D7FF"/>
+                </a:solidFill>
+                <a:latin typeface="Aptos"/>
+              </a:defRPr>
+            </a:pPr>
+            <a:r>
+              <a:rPr sz="1000" b="1">
+                <a:solidFill>
+                  <a:srgbClr val="27D7FF"/>
+                </a:solidFill>
+                <a:latin typeface="Aptos"/>
+              </a:rPr>
+              <a:t>METISONE</a:t>
+            </a:r>
+          </a:p>
+        </p:txBody>
+      </p:sp>
+      <p:sp>
+        <p:nvSpPr>
+          <p:cNvPr id="41" name="title"/>
+          <p:cNvSpPr txBox="1"/>
+          <p:nvPr/>
+        </p:nvSpPr>
+        <p:spPr>
+          <a:xfrm>
+            <a:off x="762000" y="895350"/>
+            <a:ext cx="8572500" cy="552450"/>
+          </a:xfrm>
+          <a:prstGeom prst="rect">
+            <a:avLst/>
+          </a:prstGeom>
+          <a:noFill/>
+          <a:ln w="0">
+            <a:noFill/>
+          </a:ln>
+        </p:spPr>
+        <p:txBody>
+          <a:bodyPr wrap="square"/>
+          <a:lstStyle/>
+          <a:p>
+            <a:pPr algn="l">
+              <a:defRPr sz="3400" b="1">
+                <a:solidFill>
+                  <a:srgbClr val="F7FBFF"/>
+                </a:solidFill>
+                <a:latin typeface="Aptos"/>
+              </a:defRPr>
+            </a:pPr>
+            <a:r>
+              <a:rPr sz="3400" b="1">
+                <a:solidFill>
+                  <a:srgbClr val="F7FBFF"/>
+                </a:solidFill>
+                <a:latin typeface="Aptos"/>
+              </a:rPr>
+              <a:t>MetisOne runs as four replaceable services</a:t>
+            </a:r>
+          </a:p>
+        </p:txBody>
+      </p:sp>
+      <p:sp>
+        <p:nvSpPr>
+          <p:cNvPr id="42" name="subtitle"/>
+          <p:cNvSpPr txBox="1"/>
+          <p:nvPr/>
+        </p:nvSpPr>
+        <p:spPr>
+          <a:xfrm>
+            <a:off x="781050" y="1466850"/>
+            <a:ext cx="8572500" cy="361950"/>
+          </a:xfrm>
+          <a:prstGeom prst="rect">
+            <a:avLst/>
+          </a:prstGeom>
+          <a:noFill/>
+          <a:ln w="0">
+            <a:noFill/>
+          </a:ln>
+        </p:spPr>
+        <p:txBody>
+          <a:bodyPr wrap="square"/>
+          <a:lstStyle/>
+          <a:p>
+            <a:pPr algn="l">
+              <a:defRPr sz="1600" b="0">
+                <a:solidFill>
+                  <a:srgbClr val="A9B8CE"/>
+                </a:solidFill>
+                <a:latin typeface="Aptos"/>
+              </a:defRPr>
+            </a:pPr>
+            <a:r>
+              <a:rPr sz="1600" b="0">
+                <a:solidFill>
+                  <a:srgbClr val="A9B8CE"/>
+                </a:solidFill>
+                <a:latin typeface="Aptos"/>
+              </a:rPr>
+              <a:t>Local chat apps call remote semantic services while Cube Core owns the model runtime.</a:t>
+            </a:r>
+          </a:p>
+        </p:txBody>
+      </p:sp>
+      <p:sp>
+        <p:nvSpPr>
+          <p:cNvPr id="43" name="local-boundary"/>
+          <p:cNvSpPr/>
+          <p:nvPr/>
+        </p:nvSpPr>
+        <p:spPr>
+          <a:xfrm>
+            <a:off x="762000" y="2095500"/>
+            <a:ext cx="4762500" cy="3333750"/>
+          </a:xfrm>
+          <a:prstGeom prst="roundRect">
+            <a:avLst>
+              <a:gd name="adj" fmla="val 16667"/>
+            </a:avLst>
+          </a:prstGeom>
+          <a:solidFill>
+            <a:srgbClr val="0B1728"/>
+          </a:solidFill>
+          <a:ln w="12700">
+            <a:solidFill>
+              <a:srgbClr val="1D4E74"/>
+            </a:solidFill>
+            <a:prstDash val="solid"/>
+          </a:ln>
+        </p:spPr>
+        <p:txBody>
+          <a:bodyPr anchor="mid" wrap="square" lIns="91440" rIns="91440" tIns="45720" bIns="45720"/>
+          <a:lstStyle/>
+          <a:p>
+            <a:pPr algn="ctr">
+              <a:defRPr sz="100" b="0">
+                <a:solidFill>
+                  <a:srgbClr val="0B1728"/>
+                </a:solidFill>
+                <a:latin typeface="Aptos"/>
+              </a:defRPr>
+            </a:pPr>
+            <a:r>
+              <a:rPr sz="100" b="0">
+                <a:solidFill>
+                  <a:srgbClr val="0B1728"/>
+                </a:solidFill>
+                <a:latin typeface="Aptos"/>
+              </a:rPr>
+              <a:t/>
+            </a:r>
+          </a:p>
+        </p:txBody>
+      </p:sp>
+      <p:sp>
+        <p:nvSpPr>
+          <p:cNvPr id="44" name="ubuntu-boundary"/>
+          <p:cNvSpPr/>
+          <p:nvPr/>
+        </p:nvSpPr>
+        <p:spPr>
+          <a:xfrm>
+            <a:off x="6667500" y="2095500"/>
+            <a:ext cx="4762500" cy="3333750"/>
+          </a:xfrm>
+          <a:prstGeom prst="roundRect">
+            <a:avLst>
+              <a:gd name="adj" fmla="val 16667"/>
+            </a:avLst>
+          </a:prstGeom>
+          <a:solidFill>
+            <a:srgbClr val="0B1728"/>
+          </a:solidFill>
+          <a:ln w="12700">
+            <a:solidFill>
+              <a:srgbClr val="1D4E74"/>
+            </a:solidFill>
+            <a:prstDash val="solid"/>
+          </a:ln>
+        </p:spPr>
+        <p:txBody>
+          <a:bodyPr anchor="mid" wrap="square" lIns="91440" rIns="91440" tIns="45720" bIns="45720"/>
+          <a:lstStyle/>
+          <a:p>
+            <a:pPr algn="ctr">
+              <a:defRPr sz="100" b="0">
+                <a:solidFill>
+                  <a:srgbClr val="0B1728"/>
+                </a:solidFill>
+                <a:latin typeface="Aptos"/>
+              </a:defRPr>
+            </a:pPr>
+            <a:r>
+              <a:rPr sz="100" b="0">
+                <a:solidFill>
+                  <a:srgbClr val="0B1728"/>
+                </a:solidFill>
+                <a:latin typeface="Aptos"/>
+              </a:rPr>
+              <a:t/>
+            </a:r>
+          </a:p>
+        </p:txBody>
+      </p:sp>
+      <p:sp>
+        <p:nvSpPr>
+          <p:cNvPr id="45" name="local-label"/>
+          <p:cNvSpPr txBox="1"/>
+          <p:nvPr/>
+        </p:nvSpPr>
+        <p:spPr>
+          <a:xfrm>
+            <a:off x="1000125" y="2266950"/>
+            <a:ext cx="2667000" cy="285750"/>
+          </a:xfrm>
+          <a:prstGeom prst="rect">
+            <a:avLst/>
+          </a:prstGeom>
+          <a:noFill/>
+          <a:ln w="0">
+            <a:noFill/>
+          </a:ln>
+        </p:spPr>
+        <p:txBody>
+          <a:bodyPr wrap="square"/>
+          <a:lstStyle/>
+          <a:p>
+            <a:pPr algn="l">
+              <a:defRPr sz="1800" b="1">
+                <a:solidFill>
+                  <a:srgbClr val="27D7FF"/>
+                </a:solidFill>
+                <a:latin typeface="Aptos"/>
+              </a:defRPr>
+            </a:pPr>
+            <a:r>
+              <a:rPr sz="1800" b="1">
+                <a:solidFill>
+                  <a:srgbClr val="27D7FF"/>
+                </a:solidFill>
+                <a:latin typeface="Aptos"/>
+              </a:rPr>
+              <a:t>Local machine</a:t>
+            </a:r>
+          </a:p>
+        </p:txBody>
+      </p:sp>
+      <p:sp>
+        <p:nvSpPr>
+          <p:cNvPr id="46" name="ubuntu-label"/>
+          <p:cNvSpPr txBox="1"/>
+          <p:nvPr/>
+        </p:nvSpPr>
+        <p:spPr>
+          <a:xfrm>
+            <a:off x="6905625" y="2266950"/>
+            <a:ext cx="2667000" cy="285750"/>
+          </a:xfrm>
+          <a:prstGeom prst="rect">
+            <a:avLst/>
+          </a:prstGeom>
+          <a:noFill/>
+          <a:ln w="0">
+            <a:noFill/>
+          </a:ln>
+        </p:spPr>
+        <p:txBody>
+          <a:bodyPr wrap="square"/>
+          <a:lstStyle/>
+          <a:p>
+            <a:pPr algn="l">
+              <a:defRPr sz="1800" b="1">
+                <a:solidFill>
+                  <a:srgbClr val="27D7FF"/>
+                </a:solidFill>
+                <a:latin typeface="Aptos"/>
+              </a:defRPr>
+            </a:pPr>
+            <a:r>
+              <a:rPr sz="1800" b="1">
+                <a:solidFill>
+                  <a:srgbClr val="27D7FF"/>
+                </a:solidFill>
+                <a:latin typeface="Aptos"/>
+              </a:rPr>
+              <a:t>Ubuntu VM: 192.168.31.224</a:t>
+            </a:r>
+          </a:p>
+        </p:txBody>
+      </p:sp>
+      <p:sp>
+        <p:nvSpPr>
+          <p:cNvPr id="47" name="client-service"/>
+          <p:cNvSpPr/>
+          <p:nvPr/>
+        </p:nvSpPr>
+        <p:spPr>
+          <a:xfrm>
+            <a:off x="1190625" y="2857500"/>
+            <a:ext cx="3714750" cy="666750"/>
+          </a:xfrm>
+          <a:prstGeom prst="roundRect">
+            <a:avLst>
+              <a:gd name="adj" fmla="val 16667"/>
+            </a:avLst>
+          </a:prstGeom>
+          <a:solidFill>
+            <a:srgbClr val="102640"/>
+          </a:solidFill>
+          <a:ln w="12700">
+            <a:solidFill>
+              <a:srgbClr val="27D7FF"/>
+            </a:solidFill>
+            <a:prstDash val="solid"/>
+          </a:ln>
+        </p:spPr>
+        <p:txBody>
+          <a:bodyPr anchor="mid" wrap="square" lIns="91440" rIns="91440" tIns="45720" bIns="45720"/>
+          <a:lstStyle/>
+          <a:p>
+            <a:pPr algn="ctr">
+              <a:defRPr sz="1500" b="1">
+                <a:solidFill>
+                  <a:srgbClr val="F7FBFF"/>
+                </a:solidFill>
+                <a:latin typeface="Aptos"/>
+              </a:defRPr>
+            </a:pPr>
+            <a:r>
+              <a:rPr sz="1500" b="1">
+                <a:solidFill>
+                  <a:srgbClr val="F7FBFF"/>
+                </a:solidFill>
+                <a:latin typeface="Aptos"/>
+              </a:rPr>
+              <a:t>Semantic Client UI - chat for model edit and data query</a:t>
+            </a:r>
+          </a:p>
+        </p:txBody>
+      </p:sp>
+      <p:sp>
+        <p:nvSpPr>
+          <p:cNvPr id="48" name="query-service"/>
+          <p:cNvSpPr/>
+          <p:nvPr/>
+        </p:nvSpPr>
+        <p:spPr>
+          <a:xfrm>
+            <a:off x="1190625" y="4095750"/>
+            <a:ext cx="3714750" cy="666750"/>
+          </a:xfrm>
+          <a:prstGeom prst="roundRect">
+            <a:avLst>
+              <a:gd name="adj" fmla="val 16667"/>
+            </a:avLst>
+          </a:prstGeom>
+          <a:solidFill>
+            <a:srgbClr val="102640"/>
+          </a:solidFill>
+          <a:ln w="12700">
+            <a:solidFill>
+              <a:srgbClr val="34D399"/>
+            </a:solidFill>
+            <a:prstDash val="solid"/>
+          </a:ln>
+        </p:spPr>
+        <p:txBody>
+          <a:bodyPr anchor="mid" wrap="square" lIns="91440" rIns="91440" tIns="45720" bIns="45720"/>
+          <a:lstStyle/>
+          <a:p>
+            <a:pPr algn="ctr">
+              <a:defRPr sz="1500" b="1">
+                <a:solidFill>
+                  <a:srgbClr val="F7FBFF"/>
+                </a:solidFill>
+                <a:latin typeface="Aptos"/>
+              </a:defRPr>
+            </a:pPr>
+            <a:r>
+              <a:rPr sz="1500" b="1">
+                <a:solidFill>
+                  <a:srgbClr val="F7FBFF"/>
+                </a:solidFill>
+                <a:latin typeface="Aptos"/>
+              </a:rPr>
+              <a:t>Semantic Data Query Service - builds Cube REST queries</a:t>
+            </a:r>
+          </a:p>
+        </p:txBody>
+      </p:sp>
+      <p:sp>
+        <p:nvSpPr>
+          <p:cNvPr id="49" name="edit-service"/>
+          <p:cNvSpPr/>
+          <p:nvPr/>
+        </p:nvSpPr>
+        <p:spPr>
+          <a:xfrm>
+            <a:off x="7096125" y="2857500"/>
+            <a:ext cx="3714750" cy="666750"/>
+          </a:xfrm>
+          <a:prstGeom prst="roundRect">
+            <a:avLst>
+              <a:gd name="adj" fmla="val 16667"/>
+            </a:avLst>
+          </a:prstGeom>
+          <a:solidFill>
+            <a:srgbClr val="102640"/>
+          </a:solidFill>
+          <a:ln w="12700">
+            <a:solidFill>
+              <a:srgbClr val="8B5CF6"/>
+            </a:solidFill>
+            <a:prstDash val="solid"/>
+          </a:ln>
+        </p:spPr>
+        <p:txBody>
+          <a:bodyPr anchor="mid" wrap="square" lIns="91440" rIns="91440" tIns="45720" bIns="45720"/>
+          <a:lstStyle/>
+          <a:p>
+            <a:pPr algn="ctr">
+              <a:defRPr sz="1500" b="1">
+                <a:solidFill>
+                  <a:srgbClr val="F7FBFF"/>
+                </a:solidFill>
+                <a:latin typeface="Aptos"/>
+              </a:defRPr>
+            </a:pPr>
+            <a:r>
+              <a:rPr sz="1500" b="1">
+                <a:solidFill>
+                  <a:srgbClr val="F7FBFF"/>
+                </a:solidFill>
+                <a:latin typeface="Aptos"/>
+              </a:rPr>
+              <a:t>Semantic Layer Edit Service - updates Cube YAML models</a:t>
+            </a:r>
+          </a:p>
+        </p:txBody>
+      </p:sp>
+      <p:sp>
+        <p:nvSpPr>
+          <p:cNvPr id="50" name="cube-service"/>
+          <p:cNvSpPr/>
+          <p:nvPr/>
+        </p:nvSpPr>
+        <p:spPr>
+          <a:xfrm>
+            <a:off x="7096125" y="4095750"/>
+            <a:ext cx="3714750" cy="666750"/>
+          </a:xfrm>
+          <a:prstGeom prst="roundRect">
+            <a:avLst>
+              <a:gd name="adj" fmla="val 16667"/>
+            </a:avLst>
+          </a:prstGeom>
+          <a:solidFill>
+            <a:srgbClr val="102640"/>
+          </a:solidFill>
+          <a:ln w="12700">
+            <a:solidFill>
+              <a:srgbClr val="3B82F6"/>
+            </a:solidFill>
+            <a:prstDash val="solid"/>
+          </a:ln>
+        </p:spPr>
+        <p:txBody>
+          <a:bodyPr anchor="mid" wrap="square" lIns="91440" rIns="91440" tIns="45720" bIns="45720"/>
+          <a:lstStyle/>
+          <a:p>
+            <a:pPr algn="ctr">
+              <a:defRPr sz="1500" b="1">
+                <a:solidFill>
+                  <a:srgbClr val="F7FBFF"/>
+                </a:solidFill>
+                <a:latin typeface="Aptos"/>
+              </a:defRPr>
+            </a:pPr>
+            <a:r>
+              <a:rPr sz="1500" b="1">
+                <a:solidFill>
+                  <a:srgbClr val="F7FBFF"/>
+                </a:solidFill>
+                <a:latin typeface="Aptos"/>
+              </a:rPr>
+              <a:t>Cube Core Docker - semantic API and query execution</a:t>
+            </a:r>
+          </a:p>
+        </p:txBody>
+      </p:sp>
+      <p:sp>
+        <p:nvSpPr>
+          <p:cNvPr id="51" name="model-folder"/>
+          <p:cNvSpPr/>
+          <p:nvPr/>
+        </p:nvSpPr>
+        <p:spPr>
+          <a:xfrm>
+            <a:off x="7334250" y="5619750"/>
+            <a:ext cx="3238500" cy="495300"/>
+          </a:xfrm>
+          <a:prstGeom prst="roundRect">
+            <a:avLst>
+              <a:gd name="adj" fmla="val 16667"/>
+            </a:avLst>
+          </a:prstGeom>
+          <a:solidFill>
+            <a:srgbClr val="18304B"/>
+          </a:solidFill>
+          <a:ln w="12700">
+            <a:solidFill>
+              <a:srgbClr val="27D7FF"/>
+            </a:solidFill>
+            <a:prstDash val="solid"/>
+          </a:ln>
+        </p:spPr>
+        <p:txBody>
+          <a:bodyPr anchor="mid" wrap="square" lIns="91440" rIns="91440" tIns="45720" bIns="45720"/>
+          <a:lstStyle/>
+          <a:p>
+            <a:pPr algn="ctr">
+              <a:defRPr sz="1300" b="1">
+                <a:solidFill>
+                  <a:srgbClr val="F7FBFF"/>
+                </a:solidFill>
+                <a:latin typeface="Aptos"/>
+              </a:defRPr>
+            </a:pPr>
+            <a:r>
+              <a:rPr sz="1300" b="1">
+                <a:solidFill>
+                  <a:srgbClr val="F7FBFF"/>
+                </a:solidFill>
+                <a:latin typeface="Aptos"/>
+              </a:rPr>
+              <a:t>/home/cody/metisone/model/cubes/*.yml</a:t>
+            </a:r>
+          </a:p>
+        </p:txBody>
+      </p:sp>
+      <p:sp>
+        <p:nvSpPr>
+          <p:cNvPr id="52" name="model-caption"/>
+          <p:cNvSpPr txBox="1"/>
+          <p:nvPr/>
+        </p:nvSpPr>
+        <p:spPr>
+          <a:xfrm>
+            <a:off x="7524750" y="6153150"/>
+            <a:ext cx="2857500" cy="247650"/>
+          </a:xfrm>
+          <a:prstGeom prst="rect">
+            <a:avLst/>
+          </a:prstGeom>
+          <a:noFill/>
+          <a:ln w="0">
+            <a:noFill/>
+          </a:ln>
+        </p:spPr>
+        <p:txBody>
+          <a:bodyPr wrap="square"/>
+          <a:lstStyle/>
+          <a:p>
+            <a:pPr algn="l">
+              <a:defRPr sz="1200" b="0">
+                <a:solidFill>
+                  <a:srgbClr val="A9B8CE"/>
+                </a:solidFill>
+                <a:latin typeface="Aptos"/>
+              </a:defRPr>
+            </a:pPr>
+            <a:r>
+              <a:rPr sz="1200" b="0">
+                <a:solidFill>
+                  <a:srgbClr val="A9B8CE"/>
+                </a:solidFill>
+                <a:latin typeface="Aptos"/>
+              </a:rPr>
+              <a:t>Cube model files mounted into Docker</a:t>
+            </a:r>
+          </a:p>
+        </p:txBody>
+      </p:sp>
+      <p:cxnSp>
+        <p:nvCxnSpPr>
+          <p:cNvPr id="53" name="client-to-query"/>
+          <p:cNvCxnSpPr/>
+          <p:nvPr/>
+        </p:nvCxnSpPr>
+        <p:spPr>
+          <a:xfrm>
+            <a:off x="3048000" y="3524250"/>
+            <a:ext cx="9525" cy="571500"/>
+          </a:xfrm>
+          <a:prstGeom prst="line">
+            <a:avLst/>
+          </a:prstGeom>
+          <a:ln w="25400">
+            <a:solidFill>
+              <a:srgbClr val="34D399"/>
+            </a:solidFill>
+            <a:tailEnd type="none"/>
+            <a:headEnd type="triangle"/>
+          </a:ln>
+        </p:spPr>
+      </p:cxnSp>
+      <p:cxnSp>
+        <p:nvCxnSpPr>
+          <p:cNvPr id="54" name="query-to-cube"/>
+          <p:cNvCxnSpPr/>
+          <p:nvPr/>
+        </p:nvCxnSpPr>
+        <p:spPr>
+          <a:xfrm>
+            <a:off x="4905375" y="4429125"/>
+            <a:ext cx="2190750" cy="9525"/>
+          </a:xfrm>
+          <a:prstGeom prst="line">
+            <a:avLst/>
+          </a:prstGeom>
+          <a:ln w="25400">
+            <a:solidFill>
+              <a:srgbClr val="34D399"/>
+            </a:solidFill>
+            <a:tailEnd type="none"/>
+            <a:headEnd type="triangle"/>
+          </a:ln>
+        </p:spPr>
+      </p:cxnSp>
+      <p:cxnSp>
+        <p:nvCxnSpPr>
+          <p:cNvPr id="55" name="client-to-edit"/>
+          <p:cNvCxnSpPr/>
+          <p:nvPr/>
+        </p:nvCxnSpPr>
+        <p:spPr>
+          <a:xfrm>
+            <a:off x="4905375" y="3190875"/>
+            <a:ext cx="2190750" cy="9525"/>
+          </a:xfrm>
+          <a:prstGeom prst="line">
+            <a:avLst/>
+          </a:prstGeom>
+          <a:ln w="25400">
+            <a:solidFill>
+              <a:srgbClr val="8B5CF6"/>
+            </a:solidFill>
+            <a:tailEnd type="none"/>
+            <a:headEnd type="triangle"/>
+          </a:ln>
+        </p:spPr>
+      </p:cxnSp>
+      <p:cxnSp>
+        <p:nvCxnSpPr>
+          <p:cNvPr id="56" name="edit-to-model"/>
+          <p:cNvCxnSpPr/>
+          <p:nvPr/>
+        </p:nvCxnSpPr>
+        <p:spPr>
+          <a:xfrm>
+            <a:off x="8858250" y="3524250"/>
+            <a:ext cx="9525" cy="2095500"/>
+          </a:xfrm>
+          <a:prstGeom prst="line">
+            <a:avLst/>
+          </a:prstGeom>
+          <a:ln w="25400">
+            <a:solidFill>
+              <a:srgbClr val="8B5CF6"/>
+            </a:solidFill>
+            <a:tailEnd type="none"/>
+            <a:headEnd type="triangle"/>
+          </a:ln>
+        </p:spPr>
+      </p:cxnSp>
+      <p:cxnSp>
+        <p:nvCxnSpPr>
+          <p:cNvPr id="57" name="cube-to-model"/>
+          <p:cNvCxnSpPr/>
+          <p:nvPr/>
+        </p:nvCxnSpPr>
+        <p:spPr>
+          <a:xfrm>
+            <a:off x="9334500" y="4762500"/>
+            <a:ext cx="9525" cy="857250"/>
+          </a:xfrm>
+          <a:prstGeom prst="line">
+            <a:avLst/>
+          </a:prstGeom>
+          <a:ln w="25400">
+            <a:solidFill>
+              <a:srgbClr val="3B82F6"/>
+            </a:solidFill>
+            <a:tailEnd type="none"/>
+            <a:headEnd type="triangle"/>
+          </a:ln>
+        </p:spPr>
+      </p:cxnSp>
+      <p:sp>
+        <p:nvSpPr>
+          <p:cNvPr id="58" name="query-arrow-label"/>
+          <p:cNvSpPr txBox="1"/>
+          <p:nvPr/>
+        </p:nvSpPr>
+        <p:spPr>
+          <a:xfrm>
+            <a:off x="5381625" y="4171950"/>
+            <a:ext cx="1238250" cy="247650"/>
+          </a:xfrm>
+          <a:prstGeom prst="rect">
+            <a:avLst/>
+          </a:prstGeom>
+          <a:noFill/>
+          <a:ln w="0">
+            <a:noFill/>
+          </a:ln>
+        </p:spPr>
+        <p:txBody>
+          <a:bodyPr wrap="square"/>
+          <a:lstStyle/>
+          <a:p>
+            <a:pPr algn="ctr">
+              <a:defRPr sz="1200" b="1">
+                <a:solidFill>
+                  <a:srgbClr val="34D399"/>
+                </a:solidFill>
+                <a:latin typeface="Aptos"/>
+              </a:defRPr>
+            </a:pPr>
+            <a:r>
+              <a:rPr sz="1200" b="1">
+                <a:solidFill>
+                  <a:srgbClr val="34D399"/>
+                </a:solidFill>
+                <a:latin typeface="Aptos"/>
+              </a:rPr>
+              <a:t>REST /load</a:t>
+            </a:r>
+          </a:p>
+        </p:txBody>
+      </p:sp>
+      <p:sp>
+        <p:nvSpPr>
+          <p:cNvPr id="59" name="edit-arrow-label"/>
+          <p:cNvSpPr txBox="1"/>
+          <p:nvPr/>
+        </p:nvSpPr>
+        <p:spPr>
+          <a:xfrm>
+            <a:off x="5362575" y="2924175"/>
+            <a:ext cx="1381125" cy="247650"/>
+          </a:xfrm>
+          <a:prstGeom prst="rect">
+            <a:avLst/>
+          </a:prstGeom>
+          <a:noFill/>
+          <a:ln w="0">
+            <a:noFill/>
+          </a:ln>
+        </p:spPr>
+        <p:txBody>
+          <a:bodyPr wrap="square"/>
+          <a:lstStyle/>
+          <a:p>
+            <a:pPr algn="ctr">
+              <a:defRPr sz="1200" b="1">
+                <a:solidFill>
+                  <a:srgbClr val="8B5CF6"/>
+                </a:solidFill>
+                <a:latin typeface="Aptos"/>
+              </a:defRPr>
+            </a:pPr>
+            <a:r>
+              <a:rPr sz="1200" b="1">
+                <a:solidFill>
+                  <a:srgbClr val="8B5CF6"/>
+                </a:solidFill>
+                <a:latin typeface="Aptos"/>
+              </a:rPr>
+              <a:t>Edit API</a:t>
+            </a:r>
+          </a:p>
+        </p:txBody>
+      </p:sp>
+      <p:sp>
+        <p:nvSpPr>
+          <p:cNvPr id="60" name="footnote"/>
+          <p:cNvSpPr txBox="1"/>
+          <p:nvPr/>
+        </p:nvSpPr>
+        <p:spPr>
+          <a:xfrm>
+            <a:off x="781050" y="6286500"/>
+            <a:ext cx="9334500" cy="266700"/>
+          </a:xfrm>
+          <a:prstGeom prst="rect">
+            <a:avLst/>
+          </a:prstGeom>
+          <a:noFill/>
+          <a:ln w="0">
+            <a:noFill/>
+          </a:ln>
+        </p:spPr>
+        <p:txBody>
+          <a:bodyPr wrap="square"/>
+          <a:lstStyle/>
+          <a:p>
+            <a:pPr algn="l">
+              <a:defRPr sz="1300" b="0">
+                <a:solidFill>
+                  <a:srgbClr val="A9B8CE"/>
+                </a:solidFill>
+                <a:latin typeface="Aptos"/>
+              </a:defRPr>
+            </a:pPr>
+            <a:r>
+              <a:rPr sz="1300" b="0">
+                <a:solidFill>
+                  <a:srgbClr val="A9B8CE"/>
+                </a:solidFill>
+                <a:latin typeface="Aptos"/>
+              </a:rPr>
+              <a:t>Query and client stay local for development; Edit Service and Cube run beside the YAML model files on Ubuntu.</a:t>
+            </a:r>
+          </a:p>
+        </p:txBody>
+      </p:sp>
+    </p:spTree>
+  </p:cSld>
+  <p:clrMapOvr>
+    <a:masterClrMapping/>
+  </p:clrMapOvr>
+</p:sld>
+</file>
+
+<file path=ppt\slides\slide2.xml><?xml version="1.0" encoding="utf-8"?>
 <p:sld xmlns:p="http://schemas.openxmlformats.org/presentationml/2006/main">
   <p:cSld>
     <p:bg>
@@ -5933,7 +8201,7 @@
 </p:sld>
 </file>
 
-<file path=ppt/slides/slide3.xml><?xml version="1.0" encoding="utf-8"?>
+<file path=ppt\slides\slide3.xml><?xml version="1.0" encoding="utf-8"?>
 <p:sld xmlns:p="http://schemas.openxmlformats.org/presentationml/2006/main">
   <p:cSld>
     <p:bg>
@@ -7484,7 +9752,7 @@
 </p:sld>
 </file>
 
-<file path=ppt/slides/slide4.xml><?xml version="1.0" encoding="utf-8"?>
+<file path=ppt\slides\slide4.xml><?xml version="1.0" encoding="utf-8"?>
 <p:sld xmlns:p="http://schemas.openxmlformats.org/presentationml/2006/main">
   <p:cSld>
     <p:bg>
@@ -8837,7 +11105,7 @@
 </p:sld>
 </file>
 
-<file path=ppt/slides/slide5.xml><?xml version="1.0" encoding="utf-8"?>
+<file path=ppt\slides\slide5.xml><?xml version="1.0" encoding="utf-8"?>
 <p:sld xmlns:p="http://schemas.openxmlformats.org/presentationml/2006/main">
   <p:cSld>
     <p:bg>
@@ -10384,7 +12652,7 @@
 </p:sld>
 </file>
 
-<file path=ppt/slides/slide6.xml><?xml version="1.0" encoding="utf-8"?>
+<file path=ppt\slides\slide6.xml><?xml version="1.0" encoding="utf-8"?>
 <p:sld xmlns:p="http://schemas.openxmlformats.org/presentationml/2006/main">
   <p:cSld>
     <p:bg>
@@ -11935,7 +14203,7 @@
 </p:sld>
 </file>
 
-<file path=ppt/slides/slide7.xml><?xml version="1.0" encoding="utf-8"?>
+<file path=ppt\slides\slide7.xml><?xml version="1.0" encoding="utf-8"?>
 <p:sld xmlns:p="http://schemas.openxmlformats.org/presentationml/2006/main">
   <p:cSld>
     <p:bg>
@@ -13518,7 +15786,7 @@
 </p:sld>
 </file>
 
-<file path=ppt/slides/slide8.xml><?xml version="1.0" encoding="utf-8"?>
+<file path=ppt\slides\slide8.xml><?xml version="1.0" encoding="utf-8"?>
 <p:sld xmlns:p="http://schemas.openxmlformats.org/presentationml/2006/main">
   <p:cSld>
     <p:bg>
@@ -15501,7 +17769,7 @@
 </p:sld>
 </file>
 
-<file path=ppt/slides/slide9.xml><?xml version="1.0" encoding="utf-8"?>
+<file path=ppt\slides\slide9.xml><?xml version="1.0" encoding="utf-8"?>
 <p:sld xmlns:p="http://schemas.openxmlformats.org/presentationml/2006/main">
   <p:cSld>
     <p:bg>
@@ -16886,7 +19154,11 @@
 </p:sld>
 </file>
 
-<file path=ppt/theme/theme1.xml><?xml version="1.0" encoding="utf-8"?>
+<file path=ppt\tableStyles.xml><?xml version="1.0" encoding="utf-8"?>
+<a:tblStyleLst xmlns:a="http://schemas.openxmlformats.org/drawingml/2006/main" def="{5C22544A-7EE6-4342-B048-85BDC9FD1C3A}"/>
+</file>
+
+<file path=ppt\theme\theme1.xml><?xml version="1.0" encoding="utf-8"?>
 <a:theme xmlns:a="http://schemas.openxmlformats.org/drawingml/2006/main" name="ChatGPT">
   <a:themeElements>
     <a:clrScheme name="ChatGPT">
